--- a/docs/presentacion-v1.pptx
+++ b/docs/presentacion-v1.pptx
@@ -4,18 +4,21 @@
   <p:sldMasterIdLst>
     <p:sldMasterId id="2147483648" r:id="rId1"/>
   </p:sldMasterIdLst>
+  <p:notesMasterIdLst>
+    <p:notesMasterId r:id="rId11"/>
+  </p:notesMasterIdLst>
   <p:sldIdLst>
-    <p:sldId id="256" r:id="rId7"/>
-    <p:sldId id="257" r:id="rId9"/>
-    <p:sldId id="258" r:id="rId10"/>
-    <p:sldId id="259" r:id="rId11"/>
-    <p:sldId id="260" r:id="rId12"/>
-    <p:sldId id="261" r:id="rId13"/>
-    <p:sldId id="262" r:id="rId14"/>
-    <p:sldId id="263" r:id="rId15"/>
-    <p:sldId id="264" r:id="rId16"/>
+    <p:sldId id="256" r:id="rId2"/>
+    <p:sldId id="257" r:id="rId3"/>
+    <p:sldId id="258" r:id="rId4"/>
+    <p:sldId id="259" r:id="rId5"/>
+    <p:sldId id="260" r:id="rId6"/>
+    <p:sldId id="261" r:id="rId7"/>
+    <p:sldId id="262" r:id="rId8"/>
+    <p:sldId id="263" r:id="rId9"/>
+    <p:sldId id="264" r:id="rId10"/>
   </p:sldIdLst>
-  <p:sldSz cx="12191695" cy="6858000" type="screen4x3"/>
+  <p:sldSz cx="12192000" cy="6858000"/>
   <p:notesSz cx="6858000" cy="9144000"/>
   <p:defaultTextStyle>
     <a:defPPr>
@@ -112,11 +115,27 @@
       </a:defRPr>
     </a:lvl9pPr>
   </p:defaultTextStyle>
+  <p:extLst>
+    <p:ext uri="{EFAFB233-063F-42B5-8137-9DF3F51BA10A}">
+      <p15:sldGuideLst xmlns:p15="http://schemas.microsoft.com/office/powerpoint/2012/main">
+        <p15:guide id="1" orient="horz" pos="2160">
+          <p15:clr>
+            <a:srgbClr val="A4A3A4"/>
+          </p15:clr>
+        </p15:guide>
+        <p15:guide id="2" pos="2880">
+          <p15:clr>
+            <a:srgbClr val="A4A3A4"/>
+          </p15:clr>
+        </p15:guide>
+      </p15:sldGuideLst>
+    </p:ext>
+  </p:extLst>
 </p:presentation>
 </file>
 
 <file path=ppt/notesMasters/notesMaster1.xml><?xml version="1.0" encoding="utf-8"?>
-<p:notesMaster xmlns:a="http://schemas.openxmlformats.org/drawingml/2006/main" xmlns:p="http://schemas.openxmlformats.org/presentationml/2006/main" xmlns:r="http://schemas.openxmlformats.org/officeDocument/2006/relationships">
+<p:notesMaster xmlns:a="http://schemas.openxmlformats.org/drawingml/2006/main" xmlns:r="http://schemas.openxmlformats.org/officeDocument/2006/relationships" xmlns:p="http://schemas.openxmlformats.org/presentationml/2006/main">
   <p:cSld>
     <p:bg>
       <p:bgRef idx="1001">
@@ -137,241 +156,16 @@
           <a:chExt cx="0" cy="0"/>
         </a:xfrm>
       </p:grpSpPr>
-      <p:sp>
-        <p:nvSpPr>
-          <p:cNvPr id="2" name="Header Placeholder 1"/>
-          <p:cNvSpPr>
-            <a:spLocks noGrp="1"/>
-          </p:cNvSpPr>
-          <p:nvPr>
-            <p:ph type="hdr" sz="quarter"/>
-          </p:nvPr>
-        </p:nvSpPr>
-        <p:spPr>
-          <a:xfrm>
-            <a:off x="0" y="0"/>
-            <a:ext cx="2971800" cy="457200"/>
-          </a:xfrm>
-          <a:prstGeom prst="rect">
-            <a:avLst/>
-          </a:prstGeom>
-        </p:spPr>
-        <p:txBody>
-          <a:bodyPr vert="horz" lIns="91440" tIns="45720" rIns="91440" bIns="45720" rtlCol="0"/>
-          <a:lstStyle>
-            <a:lvl1pPr algn="l">
-              <a:defRPr sz="1200"/>
-            </a:lvl1pPr>
-          </a:lstStyle>
-          <a:p>
-            <a:endParaRPr lang="en-US"/>
-          </a:p>
-        </p:txBody>
-      </p:sp>
-      <p:sp>
-        <p:nvSpPr>
-          <p:cNvPr id="3" name="Date Placeholder 2"/>
-          <p:cNvSpPr>
-            <a:spLocks noGrp="1"/>
-          </p:cNvSpPr>
-          <p:nvPr>
-            <p:ph type="dt" idx="1"/>
-          </p:nvPr>
-        </p:nvSpPr>
-        <p:spPr>
-          <a:xfrm>
-            <a:off x="3884613" y="0"/>
-            <a:ext cx="2971800" cy="457200"/>
-          </a:xfrm>
-          <a:prstGeom prst="rect">
-            <a:avLst/>
-          </a:prstGeom>
-        </p:spPr>
-        <p:txBody>
-          <a:bodyPr vert="horz" lIns="91440" tIns="45720" rIns="91440" bIns="45720" rtlCol="0"/>
-          <a:lstStyle>
-            <a:lvl1pPr algn="r">
-              <a:defRPr sz="1200"/>
-            </a:lvl1pPr>
-          </a:lstStyle>
-          <a:p>
-            <a:fld id="{0F89C1C7-3DCD-1040-A9CF-14679D8B5DDD}" type="datetimeFigureOut">
-              <a:rPr lang="en-US" smtClean="0"/>
-              <a:t>10/17/16</a:t>
-            </a:fld>
-            <a:endParaRPr lang="en-US"/>
-          </a:p>
-        </p:txBody>
-      </p:sp>
-      <p:sp>
-        <p:nvSpPr>
-          <p:cNvPr id="4" name="Slide Image Placeholder 3"/>
-          <p:cNvSpPr>
-            <a:spLocks noGrp="1" noRot="1" noChangeAspect="1"/>
-          </p:cNvSpPr>
-          <p:nvPr>
-            <p:ph type="sldImg" idx="2"/>
-          </p:nvPr>
-        </p:nvSpPr>
-        <p:spPr>
-          <a:xfrm>
-            <a:off x="1143000" y="685800"/>
-            <a:ext cx="4572000" cy="3429000"/>
-          </a:xfrm>
-          <a:prstGeom prst="rect">
-            <a:avLst/>
-          </a:prstGeom>
-          <a:noFill/>
-          <a:ln w="12700">
-            <a:solidFill>
-              <a:prstClr val="black"/>
-            </a:solidFill>
-          </a:ln>
-        </p:spPr>
-        <p:txBody>
-          <a:bodyPr vert="horz" lIns="91440" tIns="45720" rIns="91440" bIns="45720" rtlCol="0" anchor="ctr"/>
-          <a:lstStyle/>
-          <a:p>
-            <a:endParaRPr lang="en-US"/>
-          </a:p>
-        </p:txBody>
-      </p:sp>
-      <p:sp>
-        <p:nvSpPr>
-          <p:cNvPr id="5" name="Notes Placeholder 4"/>
-          <p:cNvSpPr>
-            <a:spLocks noGrp="1"/>
-          </p:cNvSpPr>
-          <p:nvPr>
-            <p:ph type="body" sz="quarter" idx="3"/>
-          </p:nvPr>
-        </p:nvSpPr>
-        <p:spPr>
-          <a:xfrm>
-            <a:off x="685800" y="4343400"/>
-            <a:ext cx="5486400" cy="4114800"/>
-          </a:xfrm>
-          <a:prstGeom prst="rect">
-            <a:avLst/>
-          </a:prstGeom>
-        </p:spPr>
-        <p:txBody>
-          <a:bodyPr vert="horz" lIns="91440" tIns="45720" rIns="91440" bIns="45720" rtlCol="0"/>
-          <a:lstStyle/>
-          <a:p>
-            <a:pPr lvl="0"/>
-            <a:r>
-              <a:rPr lang="en-US" smtClean="0"/>
-              <a:t>Click to edit Master text styles</a:t>
-            </a:r>
-          </a:p>
-          <a:p>
-            <a:pPr lvl="1"/>
-            <a:r>
-              <a:rPr lang="en-US" smtClean="0"/>
-              <a:t>Second level</a:t>
-            </a:r>
-          </a:p>
-          <a:p>
-            <a:pPr lvl="2"/>
-            <a:r>
-              <a:rPr lang="en-US" smtClean="0"/>
-              <a:t>Third level</a:t>
-            </a:r>
-          </a:p>
-          <a:p>
-            <a:pPr lvl="3"/>
-            <a:r>
-              <a:rPr lang="en-US" smtClean="0"/>
-              <a:t>Fourth level</a:t>
-            </a:r>
-          </a:p>
-          <a:p>
-            <a:pPr lvl="4"/>
-            <a:r>
-              <a:rPr lang="en-US" smtClean="0"/>
-              <a:t>Fifth level</a:t>
-            </a:r>
-            <a:endParaRPr lang="en-US"/>
-          </a:p>
-        </p:txBody>
-      </p:sp>
-      <p:sp>
-        <p:nvSpPr>
-          <p:cNvPr id="6" name="Footer Placeholder 5"/>
-          <p:cNvSpPr>
-            <a:spLocks noGrp="1"/>
-          </p:cNvSpPr>
-          <p:nvPr>
-            <p:ph type="ftr" sz="quarter" idx="4"/>
-          </p:nvPr>
-        </p:nvSpPr>
-        <p:spPr>
-          <a:xfrm>
-            <a:off x="0" y="8685213"/>
-            <a:ext cx="2971800" cy="457200"/>
-          </a:xfrm>
-          <a:prstGeom prst="rect">
-            <a:avLst/>
-          </a:prstGeom>
-        </p:spPr>
-        <p:txBody>
-          <a:bodyPr vert="horz" lIns="91440" tIns="45720" rIns="91440" bIns="45720" rtlCol="0" anchor="b"/>
-          <a:lstStyle>
-            <a:lvl1pPr algn="l">
-              <a:defRPr sz="1200"/>
-            </a:lvl1pPr>
-          </a:lstStyle>
-          <a:p>
-            <a:endParaRPr lang="en-US"/>
-          </a:p>
-        </p:txBody>
-      </p:sp>
-      <p:sp>
-        <p:nvSpPr>
-          <p:cNvPr id="7" name="Slide Number Placeholder 6"/>
-          <p:cNvSpPr>
-            <a:spLocks noGrp="1"/>
-          </p:cNvSpPr>
-          <p:nvPr>
-            <p:ph type="sldNum" sz="quarter" idx="5"/>
-          </p:nvPr>
-        </p:nvSpPr>
-        <p:spPr>
-          <a:xfrm>
-            <a:off x="3884613" y="8685213"/>
-            <a:ext cx="2971800" cy="457200"/>
-          </a:xfrm>
-          <a:prstGeom prst="rect">
-            <a:avLst/>
-          </a:prstGeom>
-        </p:spPr>
-        <p:txBody>
-          <a:bodyPr vert="horz" lIns="91440" tIns="45720" rIns="91440" bIns="45720" rtlCol="0" anchor="b"/>
-          <a:lstStyle>
-            <a:lvl1pPr algn="r">
-              <a:defRPr sz="1200"/>
-            </a:lvl1pPr>
-          </a:lstStyle>
-          <a:p>
-            <a:fld id="{BB5E49A5-4136-284D-997B-48E1D791AD67}" type="slidenum">
-              <a:rPr lang="en-US" smtClean="0"/>
-              <a:t>‹#›</a:t>
-            </a:fld>
-            <a:endParaRPr lang="en-US"/>
-          </a:p>
-        </p:txBody>
-      </p:sp>
     </p:spTree>
     <p:extLst>
       <p:ext uri="{BB962C8B-B14F-4D97-AF65-F5344CB8AC3E}">
-        <p14:creationId xmlns:p14="http://schemas.microsoft.com/office/powerpoint/2010/main" val="2623252185"/>
+        <p14:creationId xmlns:p14="http://schemas.microsoft.com/office/powerpoint/2010/main" val="2291458685"/>
       </p:ext>
     </p:extLst>
   </p:cSld>
   <p:clrMap bg1="lt1" tx1="dk1" bg2="lt2" tx2="dk2" accent1="accent1" accent2="accent2" accent3="accent3" accent4="accent4" accent5="accent5" accent6="accent6" hlink="hlink" folHlink="folHlink"/>
   <p:notesStyle>
-    <a:lvl1pPr marL="0" algn="l" defTabSz="457200" rtl="0" eaLnBrk="1" latinLnBrk="0" hangingPunct="1">
+    <a:lvl1pPr marL="0" algn="l" defTabSz="914400" rtl="0" eaLnBrk="1" latinLnBrk="0" hangingPunct="1">
       <a:defRPr sz="1200" kern="1200">
         <a:solidFill>
           <a:schemeClr val="tx1"/>
@@ -381,7 +175,7 @@
         <a:cs typeface="+mn-cs"/>
       </a:defRPr>
     </a:lvl1pPr>
-    <a:lvl2pPr marL="457200" algn="l" defTabSz="457200" rtl="0" eaLnBrk="1" latinLnBrk="0" hangingPunct="1">
+    <a:lvl2pPr marL="457200" algn="l" defTabSz="914400" rtl="0" eaLnBrk="1" latinLnBrk="0" hangingPunct="1">
       <a:defRPr sz="1200" kern="1200">
         <a:solidFill>
           <a:schemeClr val="tx1"/>
@@ -391,7 +185,7 @@
         <a:cs typeface="+mn-cs"/>
       </a:defRPr>
     </a:lvl2pPr>
-    <a:lvl3pPr marL="914400" algn="l" defTabSz="457200" rtl="0" eaLnBrk="1" latinLnBrk="0" hangingPunct="1">
+    <a:lvl3pPr marL="914400" algn="l" defTabSz="914400" rtl="0" eaLnBrk="1" latinLnBrk="0" hangingPunct="1">
       <a:defRPr sz="1200" kern="1200">
         <a:solidFill>
           <a:schemeClr val="tx1"/>
@@ -401,7 +195,7 @@
         <a:cs typeface="+mn-cs"/>
       </a:defRPr>
     </a:lvl3pPr>
-    <a:lvl4pPr marL="1371600" algn="l" defTabSz="457200" rtl="0" eaLnBrk="1" latinLnBrk="0" hangingPunct="1">
+    <a:lvl4pPr marL="1371600" algn="l" defTabSz="914400" rtl="0" eaLnBrk="1" latinLnBrk="0" hangingPunct="1">
       <a:defRPr sz="1200" kern="1200">
         <a:solidFill>
           <a:schemeClr val="tx1"/>
@@ -411,7 +205,7 @@
         <a:cs typeface="+mn-cs"/>
       </a:defRPr>
     </a:lvl4pPr>
-    <a:lvl5pPr marL="1828800" algn="l" defTabSz="457200" rtl="0" eaLnBrk="1" latinLnBrk="0" hangingPunct="1">
+    <a:lvl5pPr marL="1828800" algn="l" defTabSz="914400" rtl="0" eaLnBrk="1" latinLnBrk="0" hangingPunct="1">
       <a:defRPr sz="1200" kern="1200">
         <a:solidFill>
           <a:schemeClr val="tx1"/>
@@ -421,7 +215,7 @@
         <a:cs typeface="+mn-cs"/>
       </a:defRPr>
     </a:lvl5pPr>
-    <a:lvl6pPr marL="2286000" algn="l" defTabSz="457200" rtl="0" eaLnBrk="1" latinLnBrk="0" hangingPunct="1">
+    <a:lvl6pPr marL="2286000" algn="l" defTabSz="914400" rtl="0" eaLnBrk="1" latinLnBrk="0" hangingPunct="1">
       <a:defRPr sz="1200" kern="1200">
         <a:solidFill>
           <a:schemeClr val="tx1"/>
@@ -431,7 +225,7 @@
         <a:cs typeface="+mn-cs"/>
       </a:defRPr>
     </a:lvl6pPr>
-    <a:lvl7pPr marL="2743200" algn="l" defTabSz="457200" rtl="0" eaLnBrk="1" latinLnBrk="0" hangingPunct="1">
+    <a:lvl7pPr marL="2743200" algn="l" defTabSz="914400" rtl="0" eaLnBrk="1" latinLnBrk="0" hangingPunct="1">
       <a:defRPr sz="1200" kern="1200">
         <a:solidFill>
           <a:schemeClr val="tx1"/>
@@ -441,7 +235,7 @@
         <a:cs typeface="+mn-cs"/>
       </a:defRPr>
     </a:lvl7pPr>
-    <a:lvl8pPr marL="3200400" algn="l" defTabSz="457200" rtl="0" eaLnBrk="1" latinLnBrk="0" hangingPunct="1">
+    <a:lvl8pPr marL="3200400" algn="l" defTabSz="914400" rtl="0" eaLnBrk="1" latinLnBrk="0" hangingPunct="1">
       <a:defRPr sz="1200" kern="1200">
         <a:solidFill>
           <a:schemeClr val="tx1"/>
@@ -451,7 +245,7 @@
         <a:cs typeface="+mn-cs"/>
       </a:defRPr>
     </a:lvl8pPr>
-    <a:lvl9pPr marL="3657600" algn="l" defTabSz="457200" rtl="0" eaLnBrk="1" latinLnBrk="0" hangingPunct="1">
+    <a:lvl9pPr marL="3657600" algn="l" defTabSz="914400" rtl="0" eaLnBrk="1" latinLnBrk="0" hangingPunct="1">
       <a:defRPr sz="1200" kern="1200">
         <a:solidFill>
           <a:schemeClr val="tx1"/>
@@ -466,7 +260,7 @@
 </file>
 
 <file path=ppt/notesSlides/notesSlide1.xml><?xml version="1.0" encoding="utf-8"?>
-<p:notes xmlns:a="http://schemas.openxmlformats.org/drawingml/2006/main" xmlns:p="http://schemas.openxmlformats.org/presentationml/2006/main" xmlns:r="http://schemas.openxmlformats.org/officeDocument/2006/relationships">
+<p:notes xmlns:a="http://schemas.openxmlformats.org/drawingml/2006/main" xmlns:r="http://schemas.openxmlformats.org/officeDocument/2006/relationships" xmlns:p="http://schemas.openxmlformats.org/presentationml/2006/main">
   <p:cSld>
     <p:spTree>
       <p:nvGrpSpPr>
@@ -486,7 +280,7 @@
         <p:nvSpPr>
           <p:cNvPr id="2" name="Slide Image Placeholder 1"/>
           <p:cNvSpPr>
-            <a:spLocks noGrp="1"/>
+            <a:spLocks noGrp="1" noRot="1" noChangeAspect="1"/>
           </p:cNvSpPr>
           <p:nvPr>
             <p:ph type="sldImg" idx="2"/>
@@ -501,7 +295,7 @@
             <a:spLocks noGrp="1"/>
           </p:cNvSpPr>
           <p:nvPr>
-            <p:ph type="body" idx="3" sz="quarter"/>
+            <p:ph type="body" sz="quarter" idx="3"/>
           </p:nvPr>
         </p:nvSpPr>
         <p:spPr/>
@@ -522,7 +316,7 @@
             <a:spLocks noGrp="1"/>
           </p:cNvSpPr>
           <p:nvPr>
-            <p:ph type="sldNum" idx="5" sz="quarter"/>
+            <p:ph type="sldNum" sz="quarter" idx="5"/>
           </p:nvPr>
         </p:nvSpPr>
         <p:spPr/>
@@ -536,7 +330,7 @@
 </file>
 
 <file path=ppt/notesSlides/notesSlide2.xml><?xml version="1.0" encoding="utf-8"?>
-<p:notes xmlns:a="http://schemas.openxmlformats.org/drawingml/2006/main" xmlns:p="http://schemas.openxmlformats.org/presentationml/2006/main" xmlns:r="http://schemas.openxmlformats.org/officeDocument/2006/relationships">
+<p:notes xmlns:a="http://schemas.openxmlformats.org/drawingml/2006/main" xmlns:r="http://schemas.openxmlformats.org/officeDocument/2006/relationships" xmlns:p="http://schemas.openxmlformats.org/presentationml/2006/main">
   <p:cSld>
     <p:spTree>
       <p:nvGrpSpPr>
@@ -556,7 +350,7 @@
         <p:nvSpPr>
           <p:cNvPr id="2" name="Slide Image Placeholder 1"/>
           <p:cNvSpPr>
-            <a:spLocks noGrp="1"/>
+            <a:spLocks noGrp="1" noRot="1" noChangeAspect="1"/>
           </p:cNvSpPr>
           <p:nvPr>
             <p:ph type="sldImg" idx="2"/>
@@ -571,7 +365,7 @@
             <a:spLocks noGrp="1"/>
           </p:cNvSpPr>
           <p:nvPr>
-            <p:ph type="body" idx="3" sz="quarter"/>
+            <p:ph type="body" sz="quarter" idx="3"/>
           </p:nvPr>
         </p:nvSpPr>
         <p:spPr/>
@@ -592,7 +386,7 @@
             <a:spLocks noGrp="1"/>
           </p:cNvSpPr>
           <p:nvPr>
-            <p:ph type="sldNum" idx="5" sz="quarter"/>
+            <p:ph type="sldNum" sz="quarter" idx="5"/>
           </p:nvPr>
         </p:nvSpPr>
         <p:spPr/>
@@ -606,7 +400,7 @@
 </file>
 
 <file path=ppt/notesSlides/notesSlide3.xml><?xml version="1.0" encoding="utf-8"?>
-<p:notes xmlns:a="http://schemas.openxmlformats.org/drawingml/2006/main" xmlns:p="http://schemas.openxmlformats.org/presentationml/2006/main" xmlns:r="http://schemas.openxmlformats.org/officeDocument/2006/relationships">
+<p:notes xmlns:a="http://schemas.openxmlformats.org/drawingml/2006/main" xmlns:r="http://schemas.openxmlformats.org/officeDocument/2006/relationships" xmlns:p="http://schemas.openxmlformats.org/presentationml/2006/main">
   <p:cSld>
     <p:spTree>
       <p:nvGrpSpPr>
@@ -626,7 +420,7 @@
         <p:nvSpPr>
           <p:cNvPr id="2" name="Slide Image Placeholder 1"/>
           <p:cNvSpPr>
-            <a:spLocks noGrp="1"/>
+            <a:spLocks noGrp="1" noRot="1" noChangeAspect="1"/>
           </p:cNvSpPr>
           <p:nvPr>
             <p:ph type="sldImg" idx="2"/>
@@ -641,7 +435,7 @@
             <a:spLocks noGrp="1"/>
           </p:cNvSpPr>
           <p:nvPr>
-            <p:ph type="body" idx="3" sz="quarter"/>
+            <p:ph type="body" sz="quarter" idx="3"/>
           </p:nvPr>
         </p:nvSpPr>
         <p:spPr/>
@@ -662,7 +456,7 @@
             <a:spLocks noGrp="1"/>
           </p:cNvSpPr>
           <p:nvPr>
-            <p:ph type="sldNum" idx="5" sz="quarter"/>
+            <p:ph type="sldNum" sz="quarter" idx="5"/>
           </p:nvPr>
         </p:nvSpPr>
         <p:spPr/>
@@ -676,7 +470,7 @@
 </file>
 
 <file path=ppt/notesSlides/notesSlide4.xml><?xml version="1.0" encoding="utf-8"?>
-<p:notes xmlns:a="http://schemas.openxmlformats.org/drawingml/2006/main" xmlns:p="http://schemas.openxmlformats.org/presentationml/2006/main" xmlns:r="http://schemas.openxmlformats.org/officeDocument/2006/relationships">
+<p:notes xmlns:a="http://schemas.openxmlformats.org/drawingml/2006/main" xmlns:r="http://schemas.openxmlformats.org/officeDocument/2006/relationships" xmlns:p="http://schemas.openxmlformats.org/presentationml/2006/main">
   <p:cSld>
     <p:spTree>
       <p:nvGrpSpPr>
@@ -696,7 +490,7 @@
         <p:nvSpPr>
           <p:cNvPr id="2" name="Slide Image Placeholder 1"/>
           <p:cNvSpPr>
-            <a:spLocks noGrp="1"/>
+            <a:spLocks noGrp="1" noRot="1" noChangeAspect="1"/>
           </p:cNvSpPr>
           <p:nvPr>
             <p:ph type="sldImg" idx="2"/>
@@ -711,7 +505,7 @@
             <a:spLocks noGrp="1"/>
           </p:cNvSpPr>
           <p:nvPr>
-            <p:ph type="body" idx="3" sz="quarter"/>
+            <p:ph type="body" sz="quarter" idx="3"/>
           </p:nvPr>
         </p:nvSpPr>
         <p:spPr/>
@@ -732,7 +526,7 @@
             <a:spLocks noGrp="1"/>
           </p:cNvSpPr>
           <p:nvPr>
-            <p:ph type="sldNum" idx="5" sz="quarter"/>
+            <p:ph type="sldNum" sz="quarter" idx="5"/>
           </p:nvPr>
         </p:nvSpPr>
         <p:spPr/>
@@ -746,7 +540,7 @@
 </file>
 
 <file path=ppt/notesSlides/notesSlide5.xml><?xml version="1.0" encoding="utf-8"?>
-<p:notes xmlns:a="http://schemas.openxmlformats.org/drawingml/2006/main" xmlns:p="http://schemas.openxmlformats.org/presentationml/2006/main" xmlns:r="http://schemas.openxmlformats.org/officeDocument/2006/relationships">
+<p:notes xmlns:a="http://schemas.openxmlformats.org/drawingml/2006/main" xmlns:r="http://schemas.openxmlformats.org/officeDocument/2006/relationships" xmlns:p="http://schemas.openxmlformats.org/presentationml/2006/main">
   <p:cSld>
     <p:spTree>
       <p:nvGrpSpPr>
@@ -766,7 +560,7 @@
         <p:nvSpPr>
           <p:cNvPr id="2" name="Slide Image Placeholder 1"/>
           <p:cNvSpPr>
-            <a:spLocks noGrp="1"/>
+            <a:spLocks noGrp="1" noRot="1" noChangeAspect="1"/>
           </p:cNvSpPr>
           <p:nvPr>
             <p:ph type="sldImg" idx="2"/>
@@ -781,7 +575,7 @@
             <a:spLocks noGrp="1"/>
           </p:cNvSpPr>
           <p:nvPr>
-            <p:ph type="body" idx="3" sz="quarter"/>
+            <p:ph type="body" sz="quarter" idx="3"/>
           </p:nvPr>
         </p:nvSpPr>
         <p:spPr/>
@@ -802,7 +596,7 @@
             <a:spLocks noGrp="1"/>
           </p:cNvSpPr>
           <p:nvPr>
-            <p:ph type="sldNum" idx="5" sz="quarter"/>
+            <p:ph type="sldNum" sz="quarter" idx="5"/>
           </p:nvPr>
         </p:nvSpPr>
         <p:spPr/>
@@ -816,7 +610,7 @@
 </file>
 
 <file path=ppt/notesSlides/notesSlide6.xml><?xml version="1.0" encoding="utf-8"?>
-<p:notes xmlns:a="http://schemas.openxmlformats.org/drawingml/2006/main" xmlns:p="http://schemas.openxmlformats.org/presentationml/2006/main" xmlns:r="http://schemas.openxmlformats.org/officeDocument/2006/relationships">
+<p:notes xmlns:a="http://schemas.openxmlformats.org/drawingml/2006/main" xmlns:r="http://schemas.openxmlformats.org/officeDocument/2006/relationships" xmlns:p="http://schemas.openxmlformats.org/presentationml/2006/main">
   <p:cSld>
     <p:spTree>
       <p:nvGrpSpPr>
@@ -836,7 +630,7 @@
         <p:nvSpPr>
           <p:cNvPr id="2" name="Slide Image Placeholder 1"/>
           <p:cNvSpPr>
-            <a:spLocks noGrp="1"/>
+            <a:spLocks noGrp="1" noRot="1" noChangeAspect="1"/>
           </p:cNvSpPr>
           <p:nvPr>
             <p:ph type="sldImg" idx="2"/>
@@ -851,7 +645,7 @@
             <a:spLocks noGrp="1"/>
           </p:cNvSpPr>
           <p:nvPr>
-            <p:ph type="body" idx="3" sz="quarter"/>
+            <p:ph type="body" sz="quarter" idx="3"/>
           </p:nvPr>
         </p:nvSpPr>
         <p:spPr/>
@@ -872,7 +666,7 @@
             <a:spLocks noGrp="1"/>
           </p:cNvSpPr>
           <p:nvPr>
-            <p:ph type="sldNum" idx="5" sz="quarter"/>
+            <p:ph type="sldNum" sz="quarter" idx="5"/>
           </p:nvPr>
         </p:nvSpPr>
         <p:spPr/>
@@ -886,7 +680,7 @@
 </file>
 
 <file path=ppt/notesSlides/notesSlide7.xml><?xml version="1.0" encoding="utf-8"?>
-<p:notes xmlns:a="http://schemas.openxmlformats.org/drawingml/2006/main" xmlns:p="http://schemas.openxmlformats.org/presentationml/2006/main" xmlns:r="http://schemas.openxmlformats.org/officeDocument/2006/relationships">
+<p:notes xmlns:a="http://schemas.openxmlformats.org/drawingml/2006/main" xmlns:r="http://schemas.openxmlformats.org/officeDocument/2006/relationships" xmlns:p="http://schemas.openxmlformats.org/presentationml/2006/main">
   <p:cSld>
     <p:spTree>
       <p:nvGrpSpPr>
@@ -906,7 +700,7 @@
         <p:nvSpPr>
           <p:cNvPr id="2" name="Slide Image Placeholder 1"/>
           <p:cNvSpPr>
-            <a:spLocks noGrp="1"/>
+            <a:spLocks noGrp="1" noRot="1" noChangeAspect="1"/>
           </p:cNvSpPr>
           <p:nvPr>
             <p:ph type="sldImg" idx="2"/>
@@ -921,7 +715,7 @@
             <a:spLocks noGrp="1"/>
           </p:cNvSpPr>
           <p:nvPr>
-            <p:ph type="body" idx="3" sz="quarter"/>
+            <p:ph type="body" sz="quarter" idx="3"/>
           </p:nvPr>
         </p:nvSpPr>
         <p:spPr/>
@@ -942,7 +736,7 @@
             <a:spLocks noGrp="1"/>
           </p:cNvSpPr>
           <p:nvPr>
-            <p:ph type="sldNum" idx="5" sz="quarter"/>
+            <p:ph type="sldNum" sz="quarter" idx="5"/>
           </p:nvPr>
         </p:nvSpPr>
         <p:spPr/>
@@ -956,7 +750,7 @@
 </file>
 
 <file path=ppt/notesSlides/notesSlide8.xml><?xml version="1.0" encoding="utf-8"?>
-<p:notes xmlns:a="http://schemas.openxmlformats.org/drawingml/2006/main" xmlns:p="http://schemas.openxmlformats.org/presentationml/2006/main" xmlns:r="http://schemas.openxmlformats.org/officeDocument/2006/relationships">
+<p:notes xmlns:a="http://schemas.openxmlformats.org/drawingml/2006/main" xmlns:r="http://schemas.openxmlformats.org/officeDocument/2006/relationships" xmlns:p="http://schemas.openxmlformats.org/presentationml/2006/main">
   <p:cSld>
     <p:spTree>
       <p:nvGrpSpPr>
@@ -976,7 +770,7 @@
         <p:nvSpPr>
           <p:cNvPr id="2" name="Slide Image Placeholder 1"/>
           <p:cNvSpPr>
-            <a:spLocks noGrp="1"/>
+            <a:spLocks noGrp="1" noRot="1" noChangeAspect="1"/>
           </p:cNvSpPr>
           <p:nvPr>
             <p:ph type="sldImg" idx="2"/>
@@ -991,7 +785,7 @@
             <a:spLocks noGrp="1"/>
           </p:cNvSpPr>
           <p:nvPr>
-            <p:ph type="body" idx="3" sz="quarter"/>
+            <p:ph type="body" sz="quarter" idx="3"/>
           </p:nvPr>
         </p:nvSpPr>
         <p:spPr/>
@@ -1012,7 +806,7 @@
             <a:spLocks noGrp="1"/>
           </p:cNvSpPr>
           <p:nvPr>
-            <p:ph type="sldNum" idx="5" sz="quarter"/>
+            <p:ph type="sldNum" sz="quarter" idx="5"/>
           </p:nvPr>
         </p:nvSpPr>
         <p:spPr/>
@@ -1026,7 +820,7 @@
 </file>
 
 <file path=ppt/notesSlides/notesSlide9.xml><?xml version="1.0" encoding="utf-8"?>
-<p:notes xmlns:a="http://schemas.openxmlformats.org/drawingml/2006/main" xmlns:p="http://schemas.openxmlformats.org/presentationml/2006/main" xmlns:r="http://schemas.openxmlformats.org/officeDocument/2006/relationships">
+<p:notes xmlns:a="http://schemas.openxmlformats.org/drawingml/2006/main" xmlns:r="http://schemas.openxmlformats.org/officeDocument/2006/relationships" xmlns:p="http://schemas.openxmlformats.org/presentationml/2006/main">
   <p:cSld>
     <p:spTree>
       <p:nvGrpSpPr>
@@ -1046,7 +840,7 @@
         <p:nvSpPr>
           <p:cNvPr id="2" name="Slide Image Placeholder 1"/>
           <p:cNvSpPr>
-            <a:spLocks noGrp="1"/>
+            <a:spLocks noGrp="1" noRot="1" noChangeAspect="1"/>
           </p:cNvSpPr>
           <p:nvPr>
             <p:ph type="sldImg" idx="2"/>
@@ -1061,7 +855,7 @@
             <a:spLocks noGrp="1"/>
           </p:cNvSpPr>
           <p:nvPr>
-            <p:ph type="body" idx="3" sz="quarter"/>
+            <p:ph type="body" sz="quarter" idx="3"/>
           </p:nvPr>
         </p:nvSpPr>
         <p:spPr/>
@@ -1082,7 +876,7 @@
             <a:spLocks noGrp="1"/>
           </p:cNvSpPr>
           <p:nvPr>
-            <p:ph type="sldNum" idx="5" sz="quarter"/>
+            <p:ph type="sldNum" sz="quarter" idx="5"/>
           </p:nvPr>
         </p:nvSpPr>
         <p:spPr/>
@@ -1133,10 +927,9 @@
           <a:lstStyle/>
           <a:p>
             <a:r>
-              <a:rPr lang="en-US" smtClean="0"/>
+              <a:rPr lang="en-US"/>
               <a:t>Click to edit Master title style</a:t>
             </a:r>
-            <a:endParaRPr lang="en-US"/>
           </a:p>
         </p:txBody>
       </p:sp>
@@ -1252,10 +1045,9 @@
           </a:lstStyle>
           <a:p>
             <a:r>
-              <a:rPr lang="en-US" smtClean="0"/>
+              <a:rPr lang="en-US"/>
               <a:t>Click to edit Master subtitle style</a:t>
             </a:r>
-            <a:endParaRPr lang="en-US"/>
           </a:p>
         </p:txBody>
       </p:sp>
@@ -1276,7 +1068,7 @@
           <a:p>
             <a:fld id="{5BCAD085-E8A6-8845-BD4E-CB4CCA059FC4}" type="datetimeFigureOut">
               <a:rPr lang="en-US" smtClean="0"/>
-              <a:t>1/27/13</a:t>
+              <a:t>10/2/2026</a:t>
             </a:fld>
             <a:endParaRPr lang="en-US"/>
           </a:p>
@@ -1318,7 +1110,7 @@
           <a:p>
             <a:fld id="{C1FF6DA9-008F-8B48-92A6-B652298478BF}" type="slidenum">
               <a:rPr lang="en-US" smtClean="0"/>
-              <a:t>‹#›</a:t>
+              <a:t>‹Nº›</a:t>
             </a:fld>
             <a:endParaRPr lang="en-US"/>
           </a:p>
@@ -1370,10 +1162,9 @@
           <a:lstStyle/>
           <a:p>
             <a:r>
-              <a:rPr lang="en-US" smtClean="0"/>
+              <a:rPr lang="en-US"/>
               <a:t>Click to edit Master title style</a:t>
             </a:r>
-            <a:endParaRPr lang="en-US"/>
           </a:p>
         </p:txBody>
       </p:sp>
@@ -1394,38 +1185,37 @@
           <a:p>
             <a:pPr lvl="0"/>
             <a:r>
-              <a:rPr lang="en-US" smtClean="0"/>
+              <a:rPr lang="en-US"/>
               <a:t>Click to edit Master text styles</a:t>
             </a:r>
           </a:p>
           <a:p>
             <a:pPr lvl="1"/>
             <a:r>
-              <a:rPr lang="en-US" smtClean="0"/>
+              <a:rPr lang="en-US"/>
               <a:t>Second level</a:t>
             </a:r>
           </a:p>
           <a:p>
             <a:pPr lvl="2"/>
             <a:r>
-              <a:rPr lang="en-US" smtClean="0"/>
+              <a:rPr lang="en-US"/>
               <a:t>Third level</a:t>
             </a:r>
           </a:p>
           <a:p>
             <a:pPr lvl="3"/>
             <a:r>
-              <a:rPr lang="en-US" smtClean="0"/>
+              <a:rPr lang="en-US"/>
               <a:t>Fourth level</a:t>
             </a:r>
           </a:p>
           <a:p>
             <a:pPr lvl="4"/>
             <a:r>
-              <a:rPr lang="en-US" smtClean="0"/>
+              <a:rPr lang="en-US"/>
               <a:t>Fifth level</a:t>
             </a:r>
-            <a:endParaRPr lang="en-US"/>
           </a:p>
         </p:txBody>
       </p:sp>
@@ -1446,7 +1236,7 @@
           <a:p>
             <a:fld id="{5BCAD085-E8A6-8845-BD4E-CB4CCA059FC4}" type="datetimeFigureOut">
               <a:rPr lang="en-US" smtClean="0"/>
-              <a:t>1/27/13</a:t>
+              <a:t>10/2/2026</a:t>
             </a:fld>
             <a:endParaRPr lang="en-US"/>
           </a:p>
@@ -1488,7 +1278,7 @@
           <a:p>
             <a:fld id="{C1FF6DA9-008F-8B48-92A6-B652298478BF}" type="slidenum">
               <a:rPr lang="en-US" smtClean="0"/>
-              <a:t>‹#›</a:t>
+              <a:t>‹Nº›</a:t>
             </a:fld>
             <a:endParaRPr lang="en-US"/>
           </a:p>
@@ -1545,10 +1335,9 @@
           <a:lstStyle/>
           <a:p>
             <a:r>
-              <a:rPr lang="en-US" smtClean="0"/>
+              <a:rPr lang="en-US"/>
               <a:t>Click to edit Master title style</a:t>
             </a:r>
-            <a:endParaRPr lang="en-US"/>
           </a:p>
         </p:txBody>
       </p:sp>
@@ -1574,38 +1363,37 @@
           <a:p>
             <a:pPr lvl="0"/>
             <a:r>
-              <a:rPr lang="en-US" smtClean="0"/>
+              <a:rPr lang="en-US"/>
               <a:t>Click to edit Master text styles</a:t>
             </a:r>
           </a:p>
           <a:p>
             <a:pPr lvl="1"/>
             <a:r>
-              <a:rPr lang="en-US" smtClean="0"/>
+              <a:rPr lang="en-US"/>
               <a:t>Second level</a:t>
             </a:r>
           </a:p>
           <a:p>
             <a:pPr lvl="2"/>
             <a:r>
-              <a:rPr lang="en-US" smtClean="0"/>
+              <a:rPr lang="en-US"/>
               <a:t>Third level</a:t>
             </a:r>
           </a:p>
           <a:p>
             <a:pPr lvl="3"/>
             <a:r>
-              <a:rPr lang="en-US" smtClean="0"/>
+              <a:rPr lang="en-US"/>
               <a:t>Fourth level</a:t>
             </a:r>
           </a:p>
           <a:p>
             <a:pPr lvl="4"/>
             <a:r>
-              <a:rPr lang="en-US" smtClean="0"/>
+              <a:rPr lang="en-US"/>
               <a:t>Fifth level</a:t>
             </a:r>
-            <a:endParaRPr lang="en-US"/>
           </a:p>
         </p:txBody>
       </p:sp>
@@ -1626,7 +1414,7 @@
           <a:p>
             <a:fld id="{5BCAD085-E8A6-8845-BD4E-CB4CCA059FC4}" type="datetimeFigureOut">
               <a:rPr lang="en-US" smtClean="0"/>
-              <a:t>1/27/13</a:t>
+              <a:t>10/2/2026</a:t>
             </a:fld>
             <a:endParaRPr lang="en-US"/>
           </a:p>
@@ -1668,7 +1456,7 @@
           <a:p>
             <a:fld id="{C1FF6DA9-008F-8B48-92A6-B652298478BF}" type="slidenum">
               <a:rPr lang="en-US" smtClean="0"/>
-              <a:t>‹#›</a:t>
+              <a:t>‹Nº›</a:t>
             </a:fld>
             <a:endParaRPr lang="en-US"/>
           </a:p>
@@ -1720,10 +1508,9 @@
           <a:lstStyle/>
           <a:p>
             <a:r>
-              <a:rPr lang="en-US" smtClean="0"/>
+              <a:rPr lang="en-US"/>
               <a:t>Click to edit Master title style</a:t>
             </a:r>
-            <a:endParaRPr lang="en-US"/>
           </a:p>
         </p:txBody>
       </p:sp>
@@ -1744,38 +1531,37 @@
           <a:p>
             <a:pPr lvl="0"/>
             <a:r>
-              <a:rPr lang="en-US" smtClean="0"/>
+              <a:rPr lang="en-US"/>
               <a:t>Click to edit Master text styles</a:t>
             </a:r>
           </a:p>
           <a:p>
             <a:pPr lvl="1"/>
             <a:r>
-              <a:rPr lang="en-US" smtClean="0"/>
+              <a:rPr lang="en-US"/>
               <a:t>Second level</a:t>
             </a:r>
           </a:p>
           <a:p>
             <a:pPr lvl="2"/>
             <a:r>
-              <a:rPr lang="en-US" smtClean="0"/>
+              <a:rPr lang="en-US"/>
               <a:t>Third level</a:t>
             </a:r>
           </a:p>
           <a:p>
             <a:pPr lvl="3"/>
             <a:r>
-              <a:rPr lang="en-US" smtClean="0"/>
+              <a:rPr lang="en-US"/>
               <a:t>Fourth level</a:t>
             </a:r>
           </a:p>
           <a:p>
             <a:pPr lvl="4"/>
             <a:r>
-              <a:rPr lang="en-US" smtClean="0"/>
+              <a:rPr lang="en-US"/>
               <a:t>Fifth level</a:t>
             </a:r>
-            <a:endParaRPr lang="en-US"/>
           </a:p>
         </p:txBody>
       </p:sp>
@@ -1796,7 +1582,7 @@
           <a:p>
             <a:fld id="{5BCAD085-E8A6-8845-BD4E-CB4CCA059FC4}" type="datetimeFigureOut">
               <a:rPr lang="en-US" smtClean="0"/>
-              <a:t>1/27/13</a:t>
+              <a:t>10/2/2026</a:t>
             </a:fld>
             <a:endParaRPr lang="en-US"/>
           </a:p>
@@ -1838,7 +1624,7 @@
           <a:p>
             <a:fld id="{C1FF6DA9-008F-8B48-92A6-B652298478BF}" type="slidenum">
               <a:rPr lang="en-US" smtClean="0"/>
-              <a:t>‹#›</a:t>
+              <a:t>‹Nº›</a:t>
             </a:fld>
             <a:endParaRPr lang="en-US"/>
           </a:p>
@@ -1899,10 +1685,9 @@
           </a:lstStyle>
           <a:p>
             <a:r>
-              <a:rPr lang="en-US" smtClean="0"/>
+              <a:rPr lang="en-US"/>
               <a:t>Click to edit Master title style</a:t>
             </a:r>
-            <a:endParaRPr lang="en-US"/>
           </a:p>
         </p:txBody>
       </p:sp>
@@ -2019,7 +1804,7 @@
           <a:p>
             <a:pPr lvl="0"/>
             <a:r>
-              <a:rPr lang="en-US" smtClean="0"/>
+              <a:rPr lang="en-US"/>
               <a:t>Click to edit Master text styles</a:t>
             </a:r>
           </a:p>
@@ -2042,7 +1827,7 @@
           <a:p>
             <a:fld id="{5BCAD085-E8A6-8845-BD4E-CB4CCA059FC4}" type="datetimeFigureOut">
               <a:rPr lang="en-US" smtClean="0"/>
-              <a:t>1/27/13</a:t>
+              <a:t>10/2/2026</a:t>
             </a:fld>
             <a:endParaRPr lang="en-US"/>
           </a:p>
@@ -2084,7 +1869,7 @@
           <a:p>
             <a:fld id="{C1FF6DA9-008F-8B48-92A6-B652298478BF}" type="slidenum">
               <a:rPr lang="en-US" smtClean="0"/>
-              <a:t>‹#›</a:t>
+              <a:t>‹Nº›</a:t>
             </a:fld>
             <a:endParaRPr lang="en-US"/>
           </a:p>
@@ -2136,10 +1921,9 @@
           <a:lstStyle/>
           <a:p>
             <a:r>
-              <a:rPr lang="en-US" smtClean="0"/>
+              <a:rPr lang="en-US"/>
               <a:t>Click to edit Master title style</a:t>
             </a:r>
-            <a:endParaRPr lang="en-US"/>
           </a:p>
         </p:txBody>
       </p:sp>
@@ -2193,38 +1977,37 @@
           <a:p>
             <a:pPr lvl="0"/>
             <a:r>
-              <a:rPr lang="en-US" smtClean="0"/>
+              <a:rPr lang="en-US"/>
               <a:t>Click to edit Master text styles</a:t>
             </a:r>
           </a:p>
           <a:p>
             <a:pPr lvl="1"/>
             <a:r>
-              <a:rPr lang="en-US" smtClean="0"/>
+              <a:rPr lang="en-US"/>
               <a:t>Second level</a:t>
             </a:r>
           </a:p>
           <a:p>
             <a:pPr lvl="2"/>
             <a:r>
-              <a:rPr lang="en-US" smtClean="0"/>
+              <a:rPr lang="en-US"/>
               <a:t>Third level</a:t>
             </a:r>
           </a:p>
           <a:p>
             <a:pPr lvl="3"/>
             <a:r>
-              <a:rPr lang="en-US" smtClean="0"/>
+              <a:rPr lang="en-US"/>
               <a:t>Fourth level</a:t>
             </a:r>
           </a:p>
           <a:p>
             <a:pPr lvl="4"/>
             <a:r>
-              <a:rPr lang="en-US" smtClean="0"/>
+              <a:rPr lang="en-US"/>
               <a:t>Fifth level</a:t>
             </a:r>
-            <a:endParaRPr lang="en-US"/>
           </a:p>
         </p:txBody>
       </p:sp>
@@ -2278,38 +2061,37 @@
           <a:p>
             <a:pPr lvl="0"/>
             <a:r>
-              <a:rPr lang="en-US" smtClean="0"/>
+              <a:rPr lang="en-US"/>
               <a:t>Click to edit Master text styles</a:t>
             </a:r>
           </a:p>
           <a:p>
             <a:pPr lvl="1"/>
             <a:r>
-              <a:rPr lang="en-US" smtClean="0"/>
+              <a:rPr lang="en-US"/>
               <a:t>Second level</a:t>
             </a:r>
           </a:p>
           <a:p>
             <a:pPr lvl="2"/>
             <a:r>
-              <a:rPr lang="en-US" smtClean="0"/>
+              <a:rPr lang="en-US"/>
               <a:t>Third level</a:t>
             </a:r>
           </a:p>
           <a:p>
             <a:pPr lvl="3"/>
             <a:r>
-              <a:rPr lang="en-US" smtClean="0"/>
+              <a:rPr lang="en-US"/>
               <a:t>Fourth level</a:t>
             </a:r>
           </a:p>
           <a:p>
             <a:pPr lvl="4"/>
             <a:r>
-              <a:rPr lang="en-US" smtClean="0"/>
+              <a:rPr lang="en-US"/>
               <a:t>Fifth level</a:t>
             </a:r>
-            <a:endParaRPr lang="en-US"/>
           </a:p>
         </p:txBody>
       </p:sp>
@@ -2330,7 +2112,7 @@
           <a:p>
             <a:fld id="{5BCAD085-E8A6-8845-BD4E-CB4CCA059FC4}" type="datetimeFigureOut">
               <a:rPr lang="en-US" smtClean="0"/>
-              <a:t>1/27/13</a:t>
+              <a:t>10/2/2026</a:t>
             </a:fld>
             <a:endParaRPr lang="en-US"/>
           </a:p>
@@ -2372,7 +2154,7 @@
           <a:p>
             <a:fld id="{C1FF6DA9-008F-8B48-92A6-B652298478BF}" type="slidenum">
               <a:rPr lang="en-US" smtClean="0"/>
-              <a:t>‹#›</a:t>
+              <a:t>‹Nº›</a:t>
             </a:fld>
             <a:endParaRPr lang="en-US"/>
           </a:p>
@@ -2428,10 +2210,9 @@
           </a:lstStyle>
           <a:p>
             <a:r>
-              <a:rPr lang="en-US" smtClean="0"/>
+              <a:rPr lang="en-US"/>
               <a:t>Click to edit Master title style</a:t>
             </a:r>
-            <a:endParaRPr lang="en-US"/>
           </a:p>
         </p:txBody>
       </p:sp>
@@ -2494,7 +2275,7 @@
           <a:p>
             <a:pPr lvl="0"/>
             <a:r>
-              <a:rPr lang="en-US" smtClean="0"/>
+              <a:rPr lang="en-US"/>
               <a:t>Click to edit Master text styles</a:t>
             </a:r>
           </a:p>
@@ -2550,38 +2331,37 @@
           <a:p>
             <a:pPr lvl="0"/>
             <a:r>
-              <a:rPr lang="en-US" smtClean="0"/>
+              <a:rPr lang="en-US"/>
               <a:t>Click to edit Master text styles</a:t>
             </a:r>
           </a:p>
           <a:p>
             <a:pPr lvl="1"/>
             <a:r>
-              <a:rPr lang="en-US" smtClean="0"/>
+              <a:rPr lang="en-US"/>
               <a:t>Second level</a:t>
             </a:r>
           </a:p>
           <a:p>
             <a:pPr lvl="2"/>
             <a:r>
-              <a:rPr lang="en-US" smtClean="0"/>
+              <a:rPr lang="en-US"/>
               <a:t>Third level</a:t>
             </a:r>
           </a:p>
           <a:p>
             <a:pPr lvl="3"/>
             <a:r>
-              <a:rPr lang="en-US" smtClean="0"/>
+              <a:rPr lang="en-US"/>
               <a:t>Fourth level</a:t>
             </a:r>
           </a:p>
           <a:p>
             <a:pPr lvl="4"/>
             <a:r>
-              <a:rPr lang="en-US" smtClean="0"/>
+              <a:rPr lang="en-US"/>
               <a:t>Fifth level</a:t>
             </a:r>
-            <a:endParaRPr lang="en-US"/>
           </a:p>
         </p:txBody>
       </p:sp>
@@ -2644,7 +2424,7 @@
           <a:p>
             <a:pPr lvl="0"/>
             <a:r>
-              <a:rPr lang="en-US" smtClean="0"/>
+              <a:rPr lang="en-US"/>
               <a:t>Click to edit Master text styles</a:t>
             </a:r>
           </a:p>
@@ -2700,38 +2480,37 @@
           <a:p>
             <a:pPr lvl="0"/>
             <a:r>
-              <a:rPr lang="en-US" smtClean="0"/>
+              <a:rPr lang="en-US"/>
               <a:t>Click to edit Master text styles</a:t>
             </a:r>
           </a:p>
           <a:p>
             <a:pPr lvl="1"/>
             <a:r>
-              <a:rPr lang="en-US" smtClean="0"/>
+              <a:rPr lang="en-US"/>
               <a:t>Second level</a:t>
             </a:r>
           </a:p>
           <a:p>
             <a:pPr lvl="2"/>
             <a:r>
-              <a:rPr lang="en-US" smtClean="0"/>
+              <a:rPr lang="en-US"/>
               <a:t>Third level</a:t>
             </a:r>
           </a:p>
           <a:p>
             <a:pPr lvl="3"/>
             <a:r>
-              <a:rPr lang="en-US" smtClean="0"/>
+              <a:rPr lang="en-US"/>
               <a:t>Fourth level</a:t>
             </a:r>
           </a:p>
           <a:p>
             <a:pPr lvl="4"/>
             <a:r>
-              <a:rPr lang="en-US" smtClean="0"/>
+              <a:rPr lang="en-US"/>
               <a:t>Fifth level</a:t>
             </a:r>
-            <a:endParaRPr lang="en-US"/>
           </a:p>
         </p:txBody>
       </p:sp>
@@ -2752,7 +2531,7 @@
           <a:p>
             <a:fld id="{5BCAD085-E8A6-8845-BD4E-CB4CCA059FC4}" type="datetimeFigureOut">
               <a:rPr lang="en-US" smtClean="0"/>
-              <a:t>1/27/13</a:t>
+              <a:t>10/2/2026</a:t>
             </a:fld>
             <a:endParaRPr lang="en-US"/>
           </a:p>
@@ -2794,7 +2573,7 @@
           <a:p>
             <a:fld id="{C1FF6DA9-008F-8B48-92A6-B652298478BF}" type="slidenum">
               <a:rPr lang="en-US" smtClean="0"/>
-              <a:t>‹#›</a:t>
+              <a:t>‹Nº›</a:t>
             </a:fld>
             <a:endParaRPr lang="en-US"/>
           </a:p>
@@ -2846,10 +2625,9 @@
           <a:lstStyle/>
           <a:p>
             <a:r>
-              <a:rPr lang="en-US" smtClean="0"/>
+              <a:rPr lang="en-US"/>
               <a:t>Click to edit Master title style</a:t>
             </a:r>
-            <a:endParaRPr lang="en-US"/>
           </a:p>
         </p:txBody>
       </p:sp>
@@ -2870,7 +2648,7 @@
           <a:p>
             <a:fld id="{5BCAD085-E8A6-8845-BD4E-CB4CCA059FC4}" type="datetimeFigureOut">
               <a:rPr lang="en-US" smtClean="0"/>
-              <a:t>1/27/13</a:t>
+              <a:t>10/2/2026</a:t>
             </a:fld>
             <a:endParaRPr lang="en-US"/>
           </a:p>
@@ -2912,7 +2690,7 @@
           <a:p>
             <a:fld id="{C1FF6DA9-008F-8B48-92A6-B652298478BF}" type="slidenum">
               <a:rPr lang="en-US" smtClean="0"/>
-              <a:t>‹#›</a:t>
+              <a:t>‹Nº›</a:t>
             </a:fld>
             <a:endParaRPr lang="en-US"/>
           </a:p>
@@ -2965,7 +2743,7 @@
           <a:p>
             <a:fld id="{5BCAD085-E8A6-8845-BD4E-CB4CCA059FC4}" type="datetimeFigureOut">
               <a:rPr lang="en-US" smtClean="0"/>
-              <a:t>1/27/13</a:t>
+              <a:t>10/2/2026</a:t>
             </a:fld>
             <a:endParaRPr lang="en-US"/>
           </a:p>
@@ -3007,7 +2785,7 @@
           <a:p>
             <a:fld id="{C1FF6DA9-008F-8B48-92A6-B652298478BF}" type="slidenum">
               <a:rPr lang="en-US" smtClean="0"/>
-              <a:t>‹#›</a:t>
+              <a:t>‹Nº›</a:t>
             </a:fld>
             <a:endParaRPr lang="en-US"/>
           </a:p>
@@ -3068,10 +2846,9 @@
           </a:lstStyle>
           <a:p>
             <a:r>
-              <a:rPr lang="en-US" smtClean="0"/>
+              <a:rPr lang="en-US"/>
               <a:t>Click to edit Master title style</a:t>
             </a:r>
-            <a:endParaRPr lang="en-US"/>
           </a:p>
         </p:txBody>
       </p:sp>
@@ -3125,38 +2902,37 @@
           <a:p>
             <a:pPr lvl="0"/>
             <a:r>
-              <a:rPr lang="en-US" smtClean="0"/>
+              <a:rPr lang="en-US"/>
               <a:t>Click to edit Master text styles</a:t>
             </a:r>
           </a:p>
           <a:p>
             <a:pPr lvl="1"/>
             <a:r>
-              <a:rPr lang="en-US" smtClean="0"/>
+              <a:rPr lang="en-US"/>
               <a:t>Second level</a:t>
             </a:r>
           </a:p>
           <a:p>
             <a:pPr lvl="2"/>
             <a:r>
-              <a:rPr lang="en-US" smtClean="0"/>
+              <a:rPr lang="en-US"/>
               <a:t>Third level</a:t>
             </a:r>
           </a:p>
           <a:p>
             <a:pPr lvl="3"/>
             <a:r>
-              <a:rPr lang="en-US" smtClean="0"/>
+              <a:rPr lang="en-US"/>
               <a:t>Fourth level</a:t>
             </a:r>
           </a:p>
           <a:p>
             <a:pPr lvl="4"/>
             <a:r>
-              <a:rPr lang="en-US" smtClean="0"/>
+              <a:rPr lang="en-US"/>
               <a:t>Fifth level</a:t>
             </a:r>
-            <a:endParaRPr lang="en-US"/>
           </a:p>
         </p:txBody>
       </p:sp>
@@ -3219,7 +2995,7 @@
           <a:p>
             <a:pPr lvl="0"/>
             <a:r>
-              <a:rPr lang="en-US" smtClean="0"/>
+              <a:rPr lang="en-US"/>
               <a:t>Click to edit Master text styles</a:t>
             </a:r>
           </a:p>
@@ -3242,7 +3018,7 @@
           <a:p>
             <a:fld id="{5BCAD085-E8A6-8845-BD4E-CB4CCA059FC4}" type="datetimeFigureOut">
               <a:rPr lang="en-US" smtClean="0"/>
-              <a:t>1/27/13</a:t>
+              <a:t>10/2/2026</a:t>
             </a:fld>
             <a:endParaRPr lang="en-US"/>
           </a:p>
@@ -3284,7 +3060,7 @@
           <a:p>
             <a:fld id="{C1FF6DA9-008F-8B48-92A6-B652298478BF}" type="slidenum">
               <a:rPr lang="en-US" smtClean="0"/>
-              <a:t>‹#›</a:t>
+              <a:t>‹Nº›</a:t>
             </a:fld>
             <a:endParaRPr lang="en-US"/>
           </a:p>
@@ -3345,10 +3121,9 @@
           </a:lstStyle>
           <a:p>
             <a:r>
-              <a:rPr lang="en-US" smtClean="0"/>
+              <a:rPr lang="en-US"/>
               <a:t>Click to edit Master title style</a:t>
             </a:r>
-            <a:endParaRPr lang="en-US"/>
           </a:p>
         </p:txBody>
       </p:sp>
@@ -3472,7 +3247,7 @@
           <a:p>
             <a:pPr lvl="0"/>
             <a:r>
-              <a:rPr lang="en-US" smtClean="0"/>
+              <a:rPr lang="en-US"/>
               <a:t>Click to edit Master text styles</a:t>
             </a:r>
           </a:p>
@@ -3495,7 +3270,7 @@
           <a:p>
             <a:fld id="{5BCAD085-E8A6-8845-BD4E-CB4CCA059FC4}" type="datetimeFigureOut">
               <a:rPr lang="en-US" smtClean="0"/>
-              <a:t>1/27/13</a:t>
+              <a:t>10/2/2026</a:t>
             </a:fld>
             <a:endParaRPr lang="en-US"/>
           </a:p>
@@ -3537,7 +3312,7 @@
           <a:p>
             <a:fld id="{C1FF6DA9-008F-8B48-92A6-B652298478BF}" type="slidenum">
               <a:rPr lang="en-US" smtClean="0"/>
-              <a:t>‹#›</a:t>
+              <a:t>‹Nº›</a:t>
             </a:fld>
             <a:endParaRPr lang="en-US"/>
           </a:p>
@@ -3604,10 +3379,9 @@
           <a:lstStyle/>
           <a:p>
             <a:r>
-              <a:rPr lang="en-US" smtClean="0"/>
+              <a:rPr lang="en-US"/>
               <a:t>Click to edit Master title style</a:t>
             </a:r>
-            <a:endParaRPr lang="en-US"/>
           </a:p>
         </p:txBody>
       </p:sp>
@@ -3638,38 +3412,37 @@
           <a:p>
             <a:pPr lvl="0"/>
             <a:r>
-              <a:rPr lang="en-US" smtClean="0"/>
+              <a:rPr lang="en-US"/>
               <a:t>Click to edit Master text styles</a:t>
             </a:r>
           </a:p>
           <a:p>
             <a:pPr lvl="1"/>
             <a:r>
-              <a:rPr lang="en-US" smtClean="0"/>
+              <a:rPr lang="en-US"/>
               <a:t>Second level</a:t>
             </a:r>
           </a:p>
           <a:p>
             <a:pPr lvl="2"/>
             <a:r>
-              <a:rPr lang="en-US" smtClean="0"/>
+              <a:rPr lang="en-US"/>
               <a:t>Third level</a:t>
             </a:r>
           </a:p>
           <a:p>
             <a:pPr lvl="3"/>
             <a:r>
-              <a:rPr lang="en-US" smtClean="0"/>
+              <a:rPr lang="en-US"/>
               <a:t>Fourth level</a:t>
             </a:r>
           </a:p>
           <a:p>
             <a:pPr lvl="4"/>
             <a:r>
-              <a:rPr lang="en-US" smtClean="0"/>
+              <a:rPr lang="en-US"/>
               <a:t>Fifth level</a:t>
             </a:r>
-            <a:endParaRPr lang="en-US"/>
           </a:p>
         </p:txBody>
       </p:sp>
@@ -3708,7 +3481,7 @@
           <a:p>
             <a:fld id="{5BCAD085-E8A6-8845-BD4E-CB4CCA059FC4}" type="datetimeFigureOut">
               <a:rPr lang="en-US" smtClean="0"/>
-              <a:t>1/27/13</a:t>
+              <a:t>10/2/2026</a:t>
             </a:fld>
             <a:endParaRPr lang="en-US"/>
           </a:p>
@@ -3786,7 +3559,7 @@
           <a:p>
             <a:fld id="{C1FF6DA9-008F-8B48-92A6-B652298478BF}" type="slidenum">
               <a:rPr lang="en-US" smtClean="0"/>
-              <a:t>‹#›</a:t>
+              <a:t>‹Nº›</a:t>
             </a:fld>
             <a:endParaRPr lang="en-US"/>
           </a:p>
@@ -4067,7 +3840,7 @@
 </file>
 
 <file path=ppt/slides/slide1.xml><?xml version="1.0" encoding="utf-8"?>
-<p:sld xmlns:a="http://schemas.openxmlformats.org/drawingml/2006/main" xmlns:p="http://schemas.openxmlformats.org/presentationml/2006/main" xmlns:r="http://schemas.openxmlformats.org/officeDocument/2006/relationships">
+<p:sld xmlns:a="http://schemas.openxmlformats.org/drawingml/2006/main" xmlns:r="http://schemas.openxmlformats.org/officeDocument/2006/relationships" xmlns:p="http://schemas.openxmlformats.org/presentationml/2006/main">
   <p:cSld>
     <p:bg>
       <p:bgPr>
@@ -4083,7 +3856,14 @@
         <p:cNvGrpSpPr/>
         <p:nvPr/>
       </p:nvGrpSpPr>
-      <p:grpSpPr/>
+      <p:grpSpPr>
+        <a:xfrm>
+          <a:off x="0" y="0"/>
+          <a:ext cx="0" cy="0"/>
+          <a:chOff x="0" y="0"/>
+          <a:chExt cx="0" cy="0"/>
+        </a:xfrm>
+      </p:grpSpPr>
       <p:sp>
         <p:nvSpPr>
           <p:cNvPr id="2" name="Oval 1"/>
@@ -4123,7 +3903,9 @@
         <p:txBody>
           <a:bodyPr rtlCol="0" anchor="ctr"/>
           <a:lstStyle/>
-          <a:p/>
+          <a:p>
+            <a:endParaRPr/>
+          </a:p>
         </p:txBody>
       </p:sp>
       <p:sp>
@@ -4165,7 +3947,9 @@
         <p:txBody>
           <a:bodyPr rtlCol="0" anchor="ctr"/>
           <a:lstStyle/>
-          <a:p/>
+          <a:p>
+            <a:endParaRPr/>
+          </a:p>
         </p:txBody>
       </p:sp>
       <p:sp>
@@ -4185,7 +3969,7 @@
           <a:noFill/>
         </p:spPr>
         <p:txBody>
-          <a:bodyPr wrap="square" lIns="0" rIns="0" tIns="0" bIns="0" anchor="t">
+          <a:bodyPr wrap="square" lIns="0" tIns="0" rIns="0" bIns="0" anchor="t">
             <a:spAutoFit/>
           </a:bodyPr>
           <a:lstStyle/>
@@ -4224,7 +4008,7 @@
           <a:noFill/>
         </p:spPr>
         <p:txBody>
-          <a:bodyPr wrap="square" lIns="0" rIns="0" tIns="0" bIns="0" anchor="t">
+          <a:bodyPr wrap="square" lIns="0" tIns="0" rIns="0" bIns="0" anchor="t">
             <a:spAutoFit/>
           </a:bodyPr>
           <a:lstStyle/>
@@ -4263,7 +4047,7 @@
           <a:noFill/>
         </p:spPr>
         <p:txBody>
-          <a:bodyPr wrap="square" lIns="0" rIns="0" tIns="0" bIns="0" anchor="t">
+          <a:bodyPr wrap="square" lIns="0" tIns="0" rIns="0" bIns="0" anchor="t">
             <a:spAutoFit/>
           </a:bodyPr>
           <a:lstStyle/>
@@ -4302,7 +4086,7 @@
           <a:noFill/>
         </p:spPr>
         <p:txBody>
-          <a:bodyPr wrap="square" lIns="0" rIns="0" tIns="0" bIns="0" anchor="t">
+          <a:bodyPr wrap="square" lIns="0" tIns="0" rIns="0" bIns="0" anchor="t">
             <a:spAutoFit/>
           </a:bodyPr>
           <a:lstStyle/>
@@ -4333,7 +4117,7 @@
 </file>
 
 <file path=ppt/slides/slide2.xml><?xml version="1.0" encoding="utf-8"?>
-<p:sld xmlns:a="http://schemas.openxmlformats.org/drawingml/2006/main" xmlns:p="http://schemas.openxmlformats.org/presentationml/2006/main" xmlns:r="http://schemas.openxmlformats.org/officeDocument/2006/relationships">
+<p:sld xmlns:a="http://schemas.openxmlformats.org/drawingml/2006/main" xmlns:r="http://schemas.openxmlformats.org/officeDocument/2006/relationships" xmlns:p="http://schemas.openxmlformats.org/presentationml/2006/main">
   <p:cSld>
     <p:bg>
       <p:bgPr>
@@ -4349,7 +4133,14 @@
         <p:cNvGrpSpPr/>
         <p:nvPr/>
       </p:nvGrpSpPr>
-      <p:grpSpPr/>
+      <p:grpSpPr>
+        <a:xfrm>
+          <a:off x="0" y="0"/>
+          <a:ext cx="0" cy="0"/>
+          <a:chOff x="0" y="0"/>
+          <a:chExt cx="0" cy="0"/>
+        </a:xfrm>
+      </p:grpSpPr>
       <p:sp>
         <p:nvSpPr>
           <p:cNvPr id="2" name="TextBox 1"/>
@@ -4367,7 +4158,7 @@
           <a:noFill/>
         </p:spPr>
         <p:txBody>
-          <a:bodyPr wrap="square" lIns="0" rIns="0" tIns="0" bIns="0" anchor="t">
+          <a:bodyPr wrap="square" lIns="0" tIns="0" rIns="0" bIns="0" anchor="t">
             <a:spAutoFit/>
           </a:bodyPr>
           <a:lstStyle/>
@@ -4406,7 +4197,7 @@
           <a:noFill/>
         </p:spPr>
         <p:txBody>
-          <a:bodyPr wrap="square" lIns="0" rIns="0" tIns="0" bIns="0" anchor="t">
+          <a:bodyPr wrap="square" lIns="0" tIns="0" rIns="0" bIns="0" anchor="t">
             <a:spAutoFit/>
           </a:bodyPr>
           <a:lstStyle/>
@@ -4501,7 +4292,9 @@
         <p:txBody>
           <a:bodyPr rtlCol="0" anchor="ctr"/>
           <a:lstStyle/>
-          <a:p/>
+          <a:p>
+            <a:endParaRPr/>
+          </a:p>
         </p:txBody>
       </p:sp>
       <p:sp>
@@ -4541,7 +4334,7 @@
           </a:fontRef>
         </p:style>
         <p:txBody>
-          <a:bodyPr rtlCol="0" anchor="ctr" wrap="square" lIns="0" rIns="0" tIns="0" bIns="0"/>
+          <a:bodyPr wrap="square" lIns="0" tIns="0" rIns="0" bIns="0" rtlCol="0" anchor="ctr"/>
           <a:lstStyle/>
           <a:p>
             <a:pPr algn="ctr">
@@ -4578,7 +4371,7 @@
           <a:noFill/>
         </p:spPr>
         <p:txBody>
-          <a:bodyPr wrap="square" lIns="0" rIns="0" tIns="0" bIns="0" anchor="t">
+          <a:bodyPr wrap="square" lIns="0" tIns="0" rIns="0" bIns="0" anchor="t">
             <a:spAutoFit/>
           </a:bodyPr>
           <a:lstStyle/>
@@ -4657,7 +4450,9 @@
         <p:txBody>
           <a:bodyPr rtlCol="0" anchor="ctr"/>
           <a:lstStyle/>
-          <a:p/>
+          <a:p>
+            <a:endParaRPr/>
+          </a:p>
         </p:txBody>
       </p:sp>
       <p:sp>
@@ -4697,7 +4492,7 @@
           </a:fontRef>
         </p:style>
         <p:txBody>
-          <a:bodyPr rtlCol="0" anchor="ctr" wrap="square" lIns="0" rIns="0" tIns="0" bIns="0"/>
+          <a:bodyPr wrap="square" lIns="0" tIns="0" rIns="0" bIns="0" rtlCol="0" anchor="ctr"/>
           <a:lstStyle/>
           <a:p>
             <a:pPr algn="ctr">
@@ -4734,7 +4529,7 @@
           <a:noFill/>
         </p:spPr>
         <p:txBody>
-          <a:bodyPr wrap="square" lIns="0" rIns="0" tIns="0" bIns="0" anchor="t">
+          <a:bodyPr wrap="square" lIns="0" tIns="0" rIns="0" bIns="0" anchor="t">
             <a:spAutoFit/>
           </a:bodyPr>
           <a:lstStyle/>
@@ -4813,7 +4608,9 @@
         <p:txBody>
           <a:bodyPr rtlCol="0" anchor="ctr"/>
           <a:lstStyle/>
-          <a:p/>
+          <a:p>
+            <a:endParaRPr/>
+          </a:p>
         </p:txBody>
       </p:sp>
       <p:sp>
@@ -4853,7 +4650,7 @@
           </a:fontRef>
         </p:style>
         <p:txBody>
-          <a:bodyPr rtlCol="0" anchor="ctr" wrap="square" lIns="0" rIns="0" tIns="0" bIns="0"/>
+          <a:bodyPr wrap="square" lIns="0" tIns="0" rIns="0" bIns="0" rtlCol="0" anchor="ctr"/>
           <a:lstStyle/>
           <a:p>
             <a:pPr algn="ctr">
@@ -4890,7 +4687,7 @@
           <a:noFill/>
         </p:spPr>
         <p:txBody>
-          <a:bodyPr wrap="square" lIns="0" rIns="0" tIns="0" bIns="0" anchor="t">
+          <a:bodyPr wrap="square" lIns="0" tIns="0" rIns="0" bIns="0" anchor="t">
             <a:spAutoFit/>
           </a:bodyPr>
           <a:lstStyle/>
@@ -4937,7 +4734,7 @@
 </file>
 
 <file path=ppt/slides/slide3.xml><?xml version="1.0" encoding="utf-8"?>
-<p:sld xmlns:a="http://schemas.openxmlformats.org/drawingml/2006/main" xmlns:p="http://schemas.openxmlformats.org/presentationml/2006/main" xmlns:r="http://schemas.openxmlformats.org/officeDocument/2006/relationships">
+<p:sld xmlns:a="http://schemas.openxmlformats.org/drawingml/2006/main" xmlns:r="http://schemas.openxmlformats.org/officeDocument/2006/relationships" xmlns:p="http://schemas.openxmlformats.org/presentationml/2006/main">
   <p:cSld>
     <p:bg>
       <p:bgPr>
@@ -4953,7 +4750,14 @@
         <p:cNvGrpSpPr/>
         <p:nvPr/>
       </p:nvGrpSpPr>
-      <p:grpSpPr/>
+      <p:grpSpPr>
+        <a:xfrm>
+          <a:off x="0" y="0"/>
+          <a:ext cx="0" cy="0"/>
+          <a:chOff x="0" y="0"/>
+          <a:chExt cx="0" cy="0"/>
+        </a:xfrm>
+      </p:grpSpPr>
       <p:sp>
         <p:nvSpPr>
           <p:cNvPr id="2" name="TextBox 1"/>
@@ -4971,7 +4775,7 @@
           <a:noFill/>
         </p:spPr>
         <p:txBody>
-          <a:bodyPr wrap="square" lIns="0" rIns="0" tIns="0" bIns="0" anchor="t">
+          <a:bodyPr wrap="square" lIns="0" tIns="0" rIns="0" bIns="0" anchor="t">
             <a:spAutoFit/>
           </a:bodyPr>
           <a:lstStyle/>
@@ -5010,7 +4814,7 @@
           <a:noFill/>
         </p:spPr>
         <p:txBody>
-          <a:bodyPr wrap="square" lIns="0" rIns="0" tIns="0" bIns="0" anchor="t">
+          <a:bodyPr wrap="square" lIns="0" tIns="0" rIns="0" bIns="0" anchor="t">
             <a:spAutoFit/>
           </a:bodyPr>
           <a:lstStyle/>
@@ -5075,7 +4879,9 @@
         <p:txBody>
           <a:bodyPr rtlCol="0" anchor="ctr"/>
           <a:lstStyle/>
-          <a:p/>
+          <a:p>
+            <a:endParaRPr/>
+          </a:p>
         </p:txBody>
       </p:sp>
       <p:sp>
@@ -5115,7 +4921,7 @@
           </a:fontRef>
         </p:style>
         <p:txBody>
-          <a:bodyPr rtlCol="0" anchor="ctr" wrap="square" lIns="0" rIns="0" tIns="0" bIns="0"/>
+          <a:bodyPr wrap="square" lIns="0" tIns="0" rIns="0" bIns="0" rtlCol="0" anchor="ctr"/>
           <a:lstStyle/>
           <a:p>
             <a:pPr algn="ctr">
@@ -5152,7 +4958,7 @@
           <a:noFill/>
         </p:spPr>
         <p:txBody>
-          <a:bodyPr wrap="square" lIns="0" rIns="0" tIns="0" bIns="0" anchor="t">
+          <a:bodyPr wrap="square" lIns="0" tIns="0" rIns="0" bIns="0" anchor="t">
             <a:spAutoFit/>
           </a:bodyPr>
           <a:lstStyle/>
@@ -5207,7 +5013,7 @@
           <a:noFill/>
         </p:spPr>
         <p:txBody>
-          <a:bodyPr wrap="square" lIns="0" rIns="0" tIns="0" bIns="0" anchor="t">
+          <a:bodyPr wrap="square" lIns="0" tIns="0" rIns="0" bIns="0" anchor="t">
             <a:spAutoFit/>
           </a:bodyPr>
           <a:lstStyle/>
@@ -5246,12 +5052,12 @@
           <a:noFill/>
         </p:spPr>
         <p:txBody>
-          <a:bodyPr wrap="square" lIns="0" rIns="0" tIns="0" bIns="0" anchor="t">
+          <a:bodyPr wrap="square" lIns="0" tIns="0" rIns="0" bIns="0" anchor="t">
             <a:spAutoFit/>
           </a:bodyPr>
           <a:lstStyle/>
           <a:p>
-            <a:pPr algn="l" marL="201168" indent="-201168">
+            <a:pPr marL="201168" indent="-201168" algn="l">
               <a:spcAft>
                 <a:spcPts val="600"/>
               </a:spcAft>
@@ -5268,7 +5074,7 @@
             </a:r>
           </a:p>
           <a:p>
-            <a:pPr algn="l" marL="201168" indent="-201168">
+            <a:pPr marL="201168" indent="-201168" algn="l">
               <a:spcAft>
                 <a:spcPts val="600"/>
               </a:spcAft>
@@ -5329,7 +5135,9 @@
         <p:txBody>
           <a:bodyPr rtlCol="0" anchor="ctr"/>
           <a:lstStyle/>
-          <a:p/>
+          <a:p>
+            <a:endParaRPr/>
+          </a:p>
         </p:txBody>
       </p:sp>
       <p:sp>
@@ -5369,7 +5177,7 @@
           </a:fontRef>
         </p:style>
         <p:txBody>
-          <a:bodyPr rtlCol="0" anchor="ctr" wrap="square" lIns="0" rIns="0" tIns="0" bIns="0"/>
+          <a:bodyPr wrap="square" lIns="0" tIns="0" rIns="0" bIns="0" rtlCol="0" anchor="ctr"/>
           <a:lstStyle/>
           <a:p>
             <a:pPr algn="ctr">
@@ -5406,7 +5214,7 @@
           <a:noFill/>
         </p:spPr>
         <p:txBody>
-          <a:bodyPr wrap="square" lIns="0" rIns="0" tIns="0" bIns="0" anchor="t">
+          <a:bodyPr wrap="square" lIns="0" tIns="0" rIns="0" bIns="0" anchor="t">
             <a:spAutoFit/>
           </a:bodyPr>
           <a:lstStyle/>
@@ -5461,7 +5269,7 @@
           <a:noFill/>
         </p:spPr>
         <p:txBody>
-          <a:bodyPr wrap="square" lIns="0" rIns="0" tIns="0" bIns="0" anchor="t">
+          <a:bodyPr wrap="square" lIns="0" tIns="0" rIns="0" bIns="0" anchor="t">
             <a:spAutoFit/>
           </a:bodyPr>
           <a:lstStyle/>
@@ -5500,12 +5308,12 @@
           <a:noFill/>
         </p:spPr>
         <p:txBody>
-          <a:bodyPr wrap="square" lIns="0" rIns="0" tIns="0" bIns="0" anchor="t">
+          <a:bodyPr wrap="square" lIns="0" tIns="0" rIns="0" bIns="0" anchor="t">
             <a:spAutoFit/>
           </a:bodyPr>
           <a:lstStyle/>
           <a:p>
-            <a:pPr algn="l" marL="201168" indent="-201168">
+            <a:pPr marL="201168" indent="-201168" algn="l">
               <a:spcAft>
                 <a:spcPts val="600"/>
               </a:spcAft>
@@ -5522,7 +5330,7 @@
             </a:r>
           </a:p>
           <a:p>
-            <a:pPr algn="l" marL="201168" indent="-201168">
+            <a:pPr marL="201168" indent="-201168" algn="l">
               <a:spcAft>
                 <a:spcPts val="600"/>
               </a:spcAft>
@@ -5539,7 +5347,7 @@
             </a:r>
           </a:p>
           <a:p>
-            <a:pPr algn="l" marL="201168" indent="-201168">
+            <a:pPr marL="201168" indent="-201168" algn="l">
               <a:spcAft>
                 <a:spcPts val="600"/>
               </a:spcAft>
@@ -5600,7 +5408,9 @@
         <p:txBody>
           <a:bodyPr rtlCol="0" anchor="ctr"/>
           <a:lstStyle/>
-          <a:p/>
+          <a:p>
+            <a:endParaRPr/>
+          </a:p>
         </p:txBody>
       </p:sp>
       <p:sp>
@@ -5640,7 +5450,7 @@
           </a:fontRef>
         </p:style>
         <p:txBody>
-          <a:bodyPr rtlCol="0" anchor="ctr" wrap="square" lIns="0" rIns="0" tIns="0" bIns="0"/>
+          <a:bodyPr wrap="square" lIns="0" tIns="0" rIns="0" bIns="0" rtlCol="0" anchor="ctr"/>
           <a:lstStyle/>
           <a:p>
             <a:pPr algn="ctr">
@@ -5677,7 +5487,7 @@
           <a:noFill/>
         </p:spPr>
         <p:txBody>
-          <a:bodyPr wrap="square" lIns="0" rIns="0" tIns="0" bIns="0" anchor="t">
+          <a:bodyPr wrap="square" lIns="0" tIns="0" rIns="0" bIns="0" anchor="t">
             <a:spAutoFit/>
           </a:bodyPr>
           <a:lstStyle/>
@@ -5732,7 +5542,7 @@
           <a:noFill/>
         </p:spPr>
         <p:txBody>
-          <a:bodyPr wrap="square" lIns="0" rIns="0" tIns="0" bIns="0" anchor="t">
+          <a:bodyPr wrap="square" lIns="0" tIns="0" rIns="0" bIns="0" anchor="t">
             <a:spAutoFit/>
           </a:bodyPr>
           <a:lstStyle/>
@@ -5771,12 +5581,12 @@
           <a:noFill/>
         </p:spPr>
         <p:txBody>
-          <a:bodyPr wrap="square" lIns="0" rIns="0" tIns="0" bIns="0" anchor="t">
+          <a:bodyPr wrap="square" lIns="0" tIns="0" rIns="0" bIns="0" anchor="t">
             <a:spAutoFit/>
           </a:bodyPr>
           <a:lstStyle/>
           <a:p>
-            <a:pPr algn="l" marL="201168" indent="-201168">
+            <a:pPr marL="201168" indent="-201168" algn="l">
               <a:spcAft>
                 <a:spcPts val="600"/>
               </a:spcAft>
@@ -5793,7 +5603,7 @@
             </a:r>
           </a:p>
           <a:p>
-            <a:pPr algn="l" marL="201168" indent="-201168">
+            <a:pPr marL="201168" indent="-201168" algn="l">
               <a:spcAft>
                 <a:spcPts val="600"/>
               </a:spcAft>
@@ -5820,7 +5630,7 @@
 </file>
 
 <file path=ppt/slides/slide4.xml><?xml version="1.0" encoding="utf-8"?>
-<p:sld xmlns:a="http://schemas.openxmlformats.org/drawingml/2006/main" xmlns:p="http://schemas.openxmlformats.org/presentationml/2006/main" xmlns:r="http://schemas.openxmlformats.org/officeDocument/2006/relationships">
+<p:sld xmlns:a="http://schemas.openxmlformats.org/drawingml/2006/main" xmlns:r="http://schemas.openxmlformats.org/officeDocument/2006/relationships" xmlns:p="http://schemas.openxmlformats.org/presentationml/2006/main">
   <p:cSld>
     <p:bg>
       <p:bgPr>
@@ -5836,7 +5646,14 @@
         <p:cNvGrpSpPr/>
         <p:nvPr/>
       </p:nvGrpSpPr>
-      <p:grpSpPr/>
+      <p:grpSpPr>
+        <a:xfrm>
+          <a:off x="0" y="0"/>
+          <a:ext cx="0" cy="0"/>
+          <a:chOff x="0" y="0"/>
+          <a:chExt cx="0" cy="0"/>
+        </a:xfrm>
+      </p:grpSpPr>
       <p:sp>
         <p:nvSpPr>
           <p:cNvPr id="2" name="TextBox 1"/>
@@ -5854,7 +5671,7 @@
           <a:noFill/>
         </p:spPr>
         <p:txBody>
-          <a:bodyPr wrap="square" lIns="0" rIns="0" tIns="0" bIns="0" anchor="t">
+          <a:bodyPr wrap="square" lIns="0" tIns="0" rIns="0" bIns="0" anchor="t">
             <a:spAutoFit/>
           </a:bodyPr>
           <a:lstStyle/>
@@ -5893,7 +5710,7 @@
           <a:noFill/>
         </p:spPr>
         <p:txBody>
-          <a:bodyPr wrap="square" lIns="0" rIns="0" tIns="0" bIns="0" anchor="t">
+          <a:bodyPr wrap="square" lIns="0" tIns="0" rIns="0" bIns="0" anchor="t">
             <a:spAutoFit/>
           </a:bodyPr>
           <a:lstStyle/>
@@ -5956,7 +5773,9 @@
         <p:txBody>
           <a:bodyPr rtlCol="0" anchor="ctr"/>
           <a:lstStyle/>
-          <a:p/>
+          <a:p>
+            <a:endParaRPr/>
+          </a:p>
         </p:txBody>
       </p:sp>
       <p:sp>
@@ -5998,7 +5817,7 @@
           </a:fontRef>
         </p:style>
         <p:txBody>
-          <a:bodyPr rtlCol="0" anchor="ctr" wrap="square" lIns="0" rIns="0" tIns="0" bIns="0"/>
+          <a:bodyPr wrap="square" lIns="0" tIns="0" rIns="0" bIns="0" rtlCol="0" anchor="ctr"/>
           <a:lstStyle/>
           <a:p>
             <a:pPr algn="ctr">
@@ -6035,7 +5854,7 @@
           <a:noFill/>
         </p:spPr>
         <p:txBody>
-          <a:bodyPr wrap="square" lIns="0" rIns="0" tIns="0" bIns="0" anchor="ctr">
+          <a:bodyPr wrap="square" lIns="0" tIns="0" rIns="0" bIns="0" anchor="ctr">
             <a:spAutoFit/>
           </a:bodyPr>
           <a:lstStyle/>
@@ -6098,7 +5917,9 @@
         <p:txBody>
           <a:bodyPr rtlCol="0" anchor="ctr"/>
           <a:lstStyle/>
-          <a:p/>
+          <a:p>
+            <a:endParaRPr/>
+          </a:p>
         </p:txBody>
       </p:sp>
       <p:sp>
@@ -6140,7 +5961,7 @@
           </a:fontRef>
         </p:style>
         <p:txBody>
-          <a:bodyPr rtlCol="0" anchor="ctr" wrap="square" lIns="0" rIns="0" tIns="0" bIns="0"/>
+          <a:bodyPr wrap="square" lIns="0" tIns="0" rIns="0" bIns="0" rtlCol="0" anchor="ctr"/>
           <a:lstStyle/>
           <a:p>
             <a:pPr algn="ctr">
@@ -6177,7 +5998,7 @@
           <a:noFill/>
         </p:spPr>
         <p:txBody>
-          <a:bodyPr wrap="square" lIns="0" rIns="0" tIns="0" bIns="0" anchor="ctr">
+          <a:bodyPr wrap="square" lIns="0" tIns="0" rIns="0" bIns="0" anchor="ctr">
             <a:spAutoFit/>
           </a:bodyPr>
           <a:lstStyle/>
@@ -6240,7 +6061,9 @@
         <p:txBody>
           <a:bodyPr rtlCol="0" anchor="ctr"/>
           <a:lstStyle/>
-          <a:p/>
+          <a:p>
+            <a:endParaRPr/>
+          </a:p>
         </p:txBody>
       </p:sp>
       <p:sp>
@@ -6282,7 +6105,7 @@
           </a:fontRef>
         </p:style>
         <p:txBody>
-          <a:bodyPr rtlCol="0" anchor="ctr" wrap="square" lIns="0" rIns="0" tIns="0" bIns="0"/>
+          <a:bodyPr wrap="square" lIns="0" tIns="0" rIns="0" bIns="0" rtlCol="0" anchor="ctr"/>
           <a:lstStyle/>
           <a:p>
             <a:pPr algn="ctr">
@@ -6319,7 +6142,7 @@
           <a:noFill/>
         </p:spPr>
         <p:txBody>
-          <a:bodyPr wrap="square" lIns="0" rIns="0" tIns="0" bIns="0" anchor="ctr">
+          <a:bodyPr wrap="square" lIns="0" tIns="0" rIns="0" bIns="0" anchor="ctr">
             <a:spAutoFit/>
           </a:bodyPr>
           <a:lstStyle/>
@@ -6382,7 +6205,9 @@
         <p:txBody>
           <a:bodyPr rtlCol="0" anchor="ctr"/>
           <a:lstStyle/>
-          <a:p/>
+          <a:p>
+            <a:endParaRPr/>
+          </a:p>
         </p:txBody>
       </p:sp>
       <p:sp>
@@ -6394,7 +6219,7 @@
         <p:spPr>
           <a:xfrm>
             <a:off x="8732520" y="1920240"/>
-            <a:ext cx="2743200" cy="3566160"/>
+            <a:ext cx="2743200" cy="2103140"/>
           </a:xfrm>
           <a:prstGeom prst="rect">
             <a:avLst/>
@@ -6402,7 +6227,7 @@
           <a:noFill/>
         </p:spPr>
         <p:txBody>
-          <a:bodyPr wrap="square" lIns="0" rIns="0" tIns="0" bIns="0" anchor="t">
+          <a:bodyPr wrap="square" lIns="0" tIns="0" rIns="0" bIns="0" anchor="t">
             <a:spAutoFit/>
           </a:bodyPr>
           <a:lstStyle/>
@@ -6413,7 +6238,7 @@
               </a:spcAft>
             </a:pPr>
             <a:r>
-              <a:rPr sz="2000" b="1" i="0">
+              <a:rPr sz="2000" b="1" i="0" dirty="0">
                 <a:solidFill>
                   <a:srgbClr val="F2A93B"/>
                 </a:solidFill>
@@ -6423,65 +6248,113 @@
             </a:r>
           </a:p>
           <a:p>
-            <a:pPr algn="l" marL="201168" indent="-201168">
+            <a:pPr marL="201168" indent="-201168" algn="l">
               <a:spcAft>
                 <a:spcPts val="800"/>
               </a:spcAft>
               <a:buChar char="•"/>
             </a:pPr>
             <a:r>
-              <a:rPr sz="1600" b="0" i="0">
+              <a:rPr sz="1600" b="0" i="0" dirty="0">
                 <a:solidFill>
                   <a:srgbClr val="FFFFFF"/>
                 </a:solidFill>
                 <a:latin typeface="Calibri"/>
               </a:rPr>
-              <a:t>Pago online (Mercado Pago)</a:t>
-            </a:r>
-          </a:p>
-          <a:p>
-            <a:pPr algn="l" marL="201168" indent="-201168">
+              <a:t>Pago </a:t>
+            </a:r>
+            <a:endParaRPr lang="es-UY" sz="1600" b="0" i="0" dirty="0">
+              <a:solidFill>
+                <a:srgbClr val="FFFFFF"/>
+              </a:solidFill>
+              <a:latin typeface="Calibri"/>
+            </a:endParaRPr>
+          </a:p>
+          <a:p>
+            <a:pPr marL="201168" indent="-201168" algn="l">
               <a:spcAft>
                 <a:spcPts val="800"/>
               </a:spcAft>
               <a:buChar char="•"/>
             </a:pPr>
             <a:r>
-              <a:rPr sz="1600" b="0" i="0">
+              <a:rPr sz="1600" b="0" i="0" dirty="0" err="1">
                 <a:solidFill>
                   <a:srgbClr val="FFFFFF"/>
                 </a:solidFill>
                 <a:latin typeface="Calibri"/>
               </a:rPr>
-              <a:t>Subdominio por club</a:t>
-            </a:r>
-          </a:p>
-          <a:p>
-            <a:pPr algn="l" marL="201168" indent="-201168">
+              <a:t>Subdominio</a:t>
+            </a:r>
+            <a:r>
+              <a:rPr sz="1600" b="0" i="0" dirty="0">
+                <a:solidFill>
+                  <a:srgbClr val="FFFFFF"/>
+                </a:solidFill>
+                <a:latin typeface="Calibri"/>
+              </a:rPr>
+              <a:t> </a:t>
+            </a:r>
+            <a:r>
+              <a:rPr sz="1600" b="0" i="0" dirty="0" err="1">
+                <a:solidFill>
+                  <a:srgbClr val="FFFFFF"/>
+                </a:solidFill>
+                <a:latin typeface="Calibri"/>
+              </a:rPr>
+              <a:t>por</a:t>
+            </a:r>
+            <a:r>
+              <a:rPr sz="1600" b="0" i="0" dirty="0">
+                <a:solidFill>
+                  <a:srgbClr val="FFFFFF"/>
+                </a:solidFill>
+                <a:latin typeface="Calibri"/>
+              </a:rPr>
+              <a:t> club</a:t>
+            </a:r>
+          </a:p>
+          <a:p>
+            <a:pPr marL="201168" indent="-201168" algn="l">
               <a:spcAft>
                 <a:spcPts val="800"/>
               </a:spcAft>
               <a:buChar char="•"/>
             </a:pPr>
             <a:r>
-              <a:rPr sz="1600" b="0" i="0">
+              <a:rPr sz="1600" b="0" i="0" dirty="0">
                 <a:solidFill>
                   <a:srgbClr val="FFFFFF"/>
                 </a:solidFill>
                 <a:latin typeface="Calibri"/>
               </a:rPr>
-              <a:t>Calendario de eventos</a:t>
-            </a:r>
-          </a:p>
-          <a:p>
-            <a:pPr algn="l" marL="201168" indent="-201168">
+              <a:t>Calendario de </a:t>
+            </a:r>
+            <a:r>
+              <a:rPr sz="1600" b="0" i="0" dirty="0" err="1">
+                <a:solidFill>
+                  <a:srgbClr val="FFFFFF"/>
+                </a:solidFill>
+                <a:latin typeface="Calibri"/>
+              </a:rPr>
+              <a:t>eventos</a:t>
+            </a:r>
+            <a:endParaRPr sz="1600" b="0" i="0" dirty="0">
+              <a:solidFill>
+                <a:srgbClr val="FFFFFF"/>
+              </a:solidFill>
+              <a:latin typeface="Calibri"/>
+            </a:endParaRPr>
+          </a:p>
+          <a:p>
+            <a:pPr marL="201168" indent="-201168" algn="l">
               <a:spcAft>
                 <a:spcPts val="800"/>
               </a:spcAft>
               <a:buChar char="•"/>
             </a:pPr>
             <a:r>
-              <a:rPr sz="1600" b="0" i="0">
+              <a:rPr sz="1600" b="0" i="0" dirty="0" err="1">
                 <a:solidFill>
                   <a:srgbClr val="FFFFFF"/>
                 </a:solidFill>
@@ -6489,16 +6362,22 @@
               </a:rPr>
               <a:t>Notificaciones</a:t>
             </a:r>
-          </a:p>
-          <a:p>
-            <a:pPr algn="l" marL="201168" indent="-201168">
+            <a:endParaRPr sz="1600" b="0" i="0" dirty="0">
+              <a:solidFill>
+                <a:srgbClr val="FFFFFF"/>
+              </a:solidFill>
+              <a:latin typeface="Calibri"/>
+            </a:endParaRPr>
+          </a:p>
+          <a:p>
+            <a:pPr marL="201168" indent="-201168" algn="l">
               <a:spcAft>
                 <a:spcPts val="800"/>
               </a:spcAft>
               <a:buChar char="•"/>
             </a:pPr>
             <a:r>
-              <a:rPr sz="1600" b="0" i="0">
+              <a:rPr sz="1600" b="0" i="0" dirty="0" err="1">
                 <a:solidFill>
                   <a:srgbClr val="FFFFFF"/>
                 </a:solidFill>
@@ -6506,6 +6385,12 @@
               </a:rPr>
               <a:t>Reportes</a:t>
             </a:r>
+            <a:endParaRPr sz="1600" b="0" i="0" dirty="0">
+              <a:solidFill>
+                <a:srgbClr val="FFFFFF"/>
+              </a:solidFill>
+              <a:latin typeface="Calibri"/>
+            </a:endParaRPr>
           </a:p>
         </p:txBody>
       </p:sp>
@@ -6518,7 +6403,7 @@
 </file>
 
 <file path=ppt/slides/slide5.xml><?xml version="1.0" encoding="utf-8"?>
-<p:sld xmlns:a="http://schemas.openxmlformats.org/drawingml/2006/main" xmlns:p="http://schemas.openxmlformats.org/presentationml/2006/main" xmlns:r="http://schemas.openxmlformats.org/officeDocument/2006/relationships">
+<p:sld xmlns:a="http://schemas.openxmlformats.org/drawingml/2006/main" xmlns:r="http://schemas.openxmlformats.org/officeDocument/2006/relationships" xmlns:p="http://schemas.openxmlformats.org/presentationml/2006/main">
   <p:cSld>
     <p:bg>
       <p:bgPr>
@@ -6534,7 +6419,14 @@
         <p:cNvGrpSpPr/>
         <p:nvPr/>
       </p:nvGrpSpPr>
-      <p:grpSpPr/>
+      <p:grpSpPr>
+        <a:xfrm>
+          <a:off x="0" y="0"/>
+          <a:ext cx="0" cy="0"/>
+          <a:chOff x="0" y="0"/>
+          <a:chExt cx="0" cy="0"/>
+        </a:xfrm>
+      </p:grpSpPr>
       <p:sp>
         <p:nvSpPr>
           <p:cNvPr id="2" name="TextBox 1"/>
@@ -6552,7 +6444,7 @@
           <a:noFill/>
         </p:spPr>
         <p:txBody>
-          <a:bodyPr wrap="square" lIns="0" rIns="0" tIns="0" bIns="0" anchor="t">
+          <a:bodyPr wrap="square" lIns="0" tIns="0" rIns="0" bIns="0" anchor="t">
             <a:spAutoFit/>
           </a:bodyPr>
           <a:lstStyle/>
@@ -6615,7 +6507,9 @@
         <p:txBody>
           <a:bodyPr rtlCol="0" anchor="ctr"/>
           <a:lstStyle/>
-          <a:p/>
+          <a:p>
+            <a:endParaRPr/>
+          </a:p>
         </p:txBody>
       </p:sp>
       <p:sp>
@@ -6635,7 +6529,7 @@
           <a:noFill/>
         </p:spPr>
         <p:txBody>
-          <a:bodyPr wrap="square" lIns="0" rIns="0" tIns="0" bIns="0" anchor="t">
+          <a:bodyPr wrap="square" lIns="0" tIns="0" rIns="0" bIns="0" anchor="t">
             <a:spAutoFit/>
           </a:bodyPr>
           <a:lstStyle/>
@@ -6674,7 +6568,7 @@
           <a:noFill/>
         </p:spPr>
         <p:txBody>
-          <a:bodyPr wrap="square" lIns="0" rIns="0" tIns="0" bIns="0" anchor="t">
+          <a:bodyPr wrap="square" lIns="0" tIns="0" rIns="0" bIns="0" anchor="t">
             <a:spAutoFit/>
           </a:bodyPr>
           <a:lstStyle/>
@@ -6737,7 +6631,7 @@
           </a:fontRef>
         </p:style>
         <p:txBody>
-          <a:bodyPr rtlCol="0" anchor="ctr" wrap="square" lIns="0" rIns="0" tIns="0" bIns="0"/>
+          <a:bodyPr wrap="square" lIns="0" tIns="0" rIns="0" bIns="0" rtlCol="0" anchor="ctr"/>
           <a:lstStyle/>
           <a:p>
             <a:pPr algn="ctr">
@@ -6810,7 +6704,7 @@
           <a:noFill/>
         </p:spPr>
         <p:txBody>
-          <a:bodyPr wrap="square" lIns="0" rIns="0" tIns="0" bIns="0" anchor="t">
+          <a:bodyPr wrap="square" lIns="0" tIns="0" rIns="0" bIns="0" anchor="t">
             <a:spAutoFit/>
           </a:bodyPr>
           <a:lstStyle/>
@@ -6871,7 +6765,7 @@
           </a:fontRef>
         </p:style>
         <p:txBody>
-          <a:bodyPr rtlCol="0" anchor="ctr" wrap="square" lIns="0" rIns="0" tIns="0" bIns="0"/>
+          <a:bodyPr wrap="square" lIns="0" tIns="0" rIns="0" bIns="0" rtlCol="0" anchor="ctr"/>
           <a:lstStyle/>
           <a:p>
             <a:pPr algn="ctr">
@@ -6887,45 +6781,6 @@
                 <a:latin typeface="Calibri"/>
               </a:rPr>
               <a:t>gestiondesocios.com/c/club</a:t>
-            </a:r>
-          </a:p>
-        </p:txBody>
-      </p:sp>
-      <p:sp>
-        <p:nvSpPr>
-          <p:cNvPr id="10" name="TextBox 9"/>
-          <p:cNvSpPr txBox="1"/>
-          <p:nvPr/>
-        </p:nvSpPr>
-        <p:spPr>
-          <a:xfrm>
-            <a:off x="914400" y="4709160"/>
-            <a:ext cx="4663440" cy="1280160"/>
-          </a:xfrm>
-          <a:prstGeom prst="rect">
-            <a:avLst/>
-          </a:prstGeom>
-          <a:noFill/>
-        </p:spPr>
-        <p:txBody>
-          <a:bodyPr wrap="square" lIns="0" rIns="0" tIns="0" bIns="0" anchor="t">
-            <a:spAutoFit/>
-          </a:bodyPr>
-          <a:lstStyle/>
-          <a:p>
-            <a:pPr algn="l">
-              <a:spcAft>
-                <a:spcPts val="600"/>
-              </a:spcAft>
-            </a:pPr>
-            <a:r>
-              <a:rPr sz="1500" b="0" i="0">
-                <a:solidFill>
-                  <a:srgbClr val="1F2933"/>
-                </a:solidFill>
-                <a:latin typeface="Calibri"/>
-              </a:rPr>
-              <a:t>Evita DNS wildcard y dominio propio. La base ya es multi-tenant: pasar a subdominios es solo cambiar el ruteo.</a:t>
             </a:r>
           </a:p>
         </p:txBody>
@@ -6971,7 +6826,9 @@
         <p:txBody>
           <a:bodyPr rtlCol="0" anchor="ctr"/>
           <a:lstStyle/>
-          <a:p/>
+          <a:p>
+            <a:endParaRPr/>
+          </a:p>
         </p:txBody>
       </p:sp>
       <p:sp>
@@ -6991,7 +6848,7 @@
           <a:noFill/>
         </p:spPr>
         <p:txBody>
-          <a:bodyPr wrap="square" lIns="0" rIns="0" tIns="0" bIns="0" anchor="t">
+          <a:bodyPr wrap="square" lIns="0" tIns="0" rIns="0" bIns="0" anchor="t">
             <a:spAutoFit/>
           </a:bodyPr>
           <a:lstStyle/>
@@ -7030,7 +6887,7 @@
           <a:noFill/>
         </p:spPr>
         <p:txBody>
-          <a:bodyPr wrap="square" lIns="0" rIns="0" tIns="0" bIns="0" anchor="t">
+          <a:bodyPr wrap="square" lIns="0" tIns="0" rIns="0" bIns="0" anchor="t">
             <a:spAutoFit/>
           </a:bodyPr>
           <a:lstStyle/>
@@ -7093,7 +6950,7 @@
           </a:fontRef>
         </p:style>
         <p:txBody>
-          <a:bodyPr rtlCol="0" anchor="ctr" wrap="square" lIns="0" rIns="0" tIns="0" bIns="0"/>
+          <a:bodyPr wrap="square" lIns="0" tIns="0" rIns="0" bIns="0" rtlCol="0" anchor="ctr"/>
           <a:lstStyle/>
           <a:p>
             <a:pPr algn="ctr">
@@ -7102,14 +6959,20 @@
               </a:spcAft>
             </a:pPr>
             <a:r>
-              <a:rPr sz="1500" b="0" i="0">
+              <a:rPr lang="es-UY" sz="1500" b="0" i="0" dirty="0">
                 <a:solidFill>
                   <a:srgbClr val="5B6770"/>
                 </a:solidFill>
                 <a:latin typeface="Calibri"/>
               </a:rPr>
-              <a:t>Pago online con pasarela</a:t>
-            </a:r>
+              <a:t>Simulamos pagos desde la página de usuario que se actualicen en la del club</a:t>
+            </a:r>
+            <a:endParaRPr sz="1500" b="0" i="0" dirty="0">
+              <a:solidFill>
+                <a:srgbClr val="5B6770"/>
+              </a:solidFill>
+              <a:latin typeface="Calibri"/>
+            </a:endParaRPr>
           </a:p>
         </p:txBody>
       </p:sp>
@@ -7166,7 +7029,7 @@
           <a:noFill/>
         </p:spPr>
         <p:txBody>
-          <a:bodyPr wrap="square" lIns="0" rIns="0" tIns="0" bIns="0" anchor="t">
+          <a:bodyPr wrap="square" lIns="0" tIns="0" rIns="0" bIns="0" anchor="t">
             <a:spAutoFit/>
           </a:bodyPr>
           <a:lstStyle/>
@@ -7227,7 +7090,7 @@
           </a:fontRef>
         </p:style>
         <p:txBody>
-          <a:bodyPr rtlCol="0" anchor="ctr" wrap="square" lIns="0" rIns="0" tIns="0" bIns="0"/>
+          <a:bodyPr wrap="square" lIns="0" tIns="0" rIns="0" bIns="0" rtlCol="0" anchor="ctr"/>
           <a:lstStyle/>
           <a:p>
             <a:pPr algn="ctr">
@@ -7236,53 +7099,20 @@
               </a:spcAft>
             </a:pPr>
             <a:r>
-              <a:rPr sz="1500" b="1" i="0">
+              <a:rPr lang="es-UY" sz="1500" b="1" dirty="0">
                 <a:solidFill>
                   <a:srgbClr val="FFFFFF"/>
                 </a:solidFill>
                 <a:latin typeface="Calibri"/>
               </a:rPr>
-              <a:t>El admin registra efectivo o transferencia</a:t>
-            </a:r>
-          </a:p>
-        </p:txBody>
-      </p:sp>
-      <p:sp>
-        <p:nvSpPr>
-          <p:cNvPr id="18" name="TextBox 17"/>
-          <p:cNvSpPr txBox="1"/>
-          <p:nvPr/>
-        </p:nvSpPr>
-        <p:spPr>
-          <a:xfrm>
-            <a:off x="6583680" y="4709160"/>
-            <a:ext cx="4663440" cy="1280160"/>
-          </a:xfrm>
-          <a:prstGeom prst="rect">
-            <a:avLst/>
-          </a:prstGeom>
-          <a:noFill/>
-        </p:spPr>
-        <p:txBody>
-          <a:bodyPr wrap="square" lIns="0" rIns="0" tIns="0" bIns="0" anchor="t">
-            <a:spAutoFit/>
-          </a:bodyPr>
-          <a:lstStyle/>
-          <a:p>
-            <a:pPr algn="l">
-              <a:spcAft>
-                <a:spcPts val="600"/>
-              </a:spcAft>
-            </a:pPr>
-            <a:r>
-              <a:rPr sz="1500" b="0" i="0">
-                <a:solidFill>
-                  <a:srgbClr val="1F2933"/>
-                </a:solidFill>
-                <a:latin typeface="Calibri"/>
-              </a:rPr>
-              <a:t>El modelo Pago ya guarda período, monto y medio. La pasarela se conecta en v2 sin cambiar datos.</a:t>
-            </a:r>
+              <a:t>El club registra pagos</a:t>
+            </a:r>
+            <a:endParaRPr sz="1500" b="1" i="0" dirty="0">
+              <a:solidFill>
+                <a:srgbClr val="FFFFFF"/>
+              </a:solidFill>
+              <a:latin typeface="Calibri"/>
+            </a:endParaRPr>
           </a:p>
         </p:txBody>
       </p:sp>
@@ -7295,7 +7125,7 @@
 </file>
 
 <file path=ppt/slides/slide6.xml><?xml version="1.0" encoding="utf-8"?>
-<p:sld xmlns:a="http://schemas.openxmlformats.org/drawingml/2006/main" xmlns:p="http://schemas.openxmlformats.org/presentationml/2006/main" xmlns:r="http://schemas.openxmlformats.org/officeDocument/2006/relationships">
+<p:sld xmlns:a="http://schemas.openxmlformats.org/drawingml/2006/main" xmlns:r="http://schemas.openxmlformats.org/officeDocument/2006/relationships" xmlns:p="http://schemas.openxmlformats.org/presentationml/2006/main">
   <p:cSld>
     <p:bg>
       <p:bgPr>
@@ -7311,7 +7141,14 @@
         <p:cNvGrpSpPr/>
         <p:nvPr/>
       </p:nvGrpSpPr>
-      <p:grpSpPr/>
+      <p:grpSpPr>
+        <a:xfrm>
+          <a:off x="0" y="0"/>
+          <a:ext cx="0" cy="0"/>
+          <a:chOff x="0" y="0"/>
+          <a:chExt cx="0" cy="0"/>
+        </a:xfrm>
+      </p:grpSpPr>
       <p:sp>
         <p:nvSpPr>
           <p:cNvPr id="2" name="TextBox 1"/>
@@ -7329,7 +7166,7 @@
           <a:noFill/>
         </p:spPr>
         <p:txBody>
-          <a:bodyPr wrap="square" lIns="0" rIns="0" tIns="0" bIns="0" anchor="t">
+          <a:bodyPr wrap="square" lIns="0" tIns="0" rIns="0" bIns="0" anchor="t">
             <a:spAutoFit/>
           </a:bodyPr>
           <a:lstStyle/>
@@ -7368,7 +7205,7 @@
           <a:noFill/>
         </p:spPr>
         <p:txBody>
-          <a:bodyPr wrap="square" lIns="0" rIns="0" tIns="0" bIns="0" anchor="t">
+          <a:bodyPr wrap="square" lIns="0" tIns="0" rIns="0" bIns="0" anchor="t">
             <a:spAutoFit/>
           </a:bodyPr>
           <a:lstStyle/>
@@ -7431,7 +7268,9 @@
         <p:txBody>
           <a:bodyPr rtlCol="0" anchor="ctr"/>
           <a:lstStyle/>
-          <a:p/>
+          <a:p>
+            <a:endParaRPr/>
+          </a:p>
         </p:txBody>
       </p:sp>
       <p:sp>
@@ -7451,7 +7290,7 @@
           <a:noFill/>
         </p:spPr>
         <p:txBody>
-          <a:bodyPr wrap="square" lIns="0" rIns="0" tIns="0" bIns="0" anchor="ctr">
+          <a:bodyPr wrap="square" lIns="0" tIns="0" rIns="0" bIns="0" anchor="ctr">
             <a:spAutoFit/>
           </a:bodyPr>
           <a:lstStyle/>
@@ -7530,7 +7369,9 @@
         <p:txBody>
           <a:bodyPr rtlCol="0" anchor="ctr"/>
           <a:lstStyle/>
-          <a:p/>
+          <a:p>
+            <a:endParaRPr/>
+          </a:p>
         </p:txBody>
       </p:sp>
       <p:sp>
@@ -7550,7 +7391,7 @@
           <a:noFill/>
         </p:spPr>
         <p:txBody>
-          <a:bodyPr wrap="square" lIns="0" rIns="0" tIns="0" bIns="0" anchor="ctr">
+          <a:bodyPr wrap="square" lIns="0" tIns="0" rIns="0" bIns="0" anchor="ctr">
             <a:spAutoFit/>
           </a:bodyPr>
           <a:lstStyle/>
@@ -7630,7 +7471,9 @@
         <p:txBody>
           <a:bodyPr rtlCol="0" anchor="ctr"/>
           <a:lstStyle/>
-          <a:p/>
+          <a:p>
+            <a:endParaRPr/>
+          </a:p>
         </p:txBody>
       </p:sp>
       <p:sp>
@@ -7650,7 +7493,7 @@
           <a:noFill/>
         </p:spPr>
         <p:txBody>
-          <a:bodyPr wrap="square" lIns="0" rIns="0" tIns="0" bIns="0" anchor="ctr">
+          <a:bodyPr wrap="square" lIns="0" tIns="0" rIns="0" bIns="0" anchor="ctr">
             <a:spAutoFit/>
           </a:bodyPr>
           <a:lstStyle/>
@@ -7730,7 +7573,9 @@
         <p:txBody>
           <a:bodyPr rtlCol="0" anchor="ctr"/>
           <a:lstStyle/>
-          <a:p/>
+          <a:p>
+            <a:endParaRPr/>
+          </a:p>
         </p:txBody>
       </p:sp>
       <p:sp>
@@ -7750,7 +7595,7 @@
           <a:noFill/>
         </p:spPr>
         <p:txBody>
-          <a:bodyPr wrap="square" lIns="0" rIns="0" tIns="0" bIns="0" anchor="ctr">
+          <a:bodyPr wrap="square" lIns="0" tIns="0" rIns="0" bIns="0" anchor="ctr">
             <a:spAutoFit/>
           </a:bodyPr>
           <a:lstStyle/>
@@ -7974,7 +7819,7 @@
           </a:fontRef>
         </p:style>
         <p:txBody>
-          <a:bodyPr rtlCol="0" anchor="ctr" wrap="square" lIns="0" rIns="0" tIns="0" bIns="0"/>
+          <a:bodyPr wrap="square" lIns="0" tIns="0" rIns="0" bIns="0" rtlCol="0" anchor="ctr"/>
           <a:lstStyle/>
           <a:p>
             <a:pPr algn="ctr">
@@ -8037,7 +7882,9 @@
         <p:txBody>
           <a:bodyPr rtlCol="0" anchor="ctr"/>
           <a:lstStyle/>
-          <a:p/>
+          <a:p>
+            <a:endParaRPr/>
+          </a:p>
         </p:txBody>
       </p:sp>
       <p:sp>
@@ -8057,7 +7904,7 @@
           <a:noFill/>
         </p:spPr>
         <p:txBody>
-          <a:bodyPr wrap="square" lIns="0" rIns="0" tIns="0" bIns="0" anchor="t">
+          <a:bodyPr wrap="square" lIns="0" tIns="0" rIns="0" bIns="0" anchor="t">
             <a:spAutoFit/>
           </a:bodyPr>
           <a:lstStyle/>
@@ -8139,7 +7986,9 @@
         <p:txBody>
           <a:bodyPr rtlCol="0" anchor="ctr"/>
           <a:lstStyle/>
-          <a:p/>
+          <a:p>
+            <a:endParaRPr/>
+          </a:p>
         </p:txBody>
       </p:sp>
       <p:sp>
@@ -8159,7 +8008,7 @@
           <a:noFill/>
         </p:spPr>
         <p:txBody>
-          <a:bodyPr wrap="square" lIns="0" rIns="0" tIns="0" bIns="0" anchor="t">
+          <a:bodyPr wrap="square" lIns="0" tIns="0" rIns="0" bIns="0" anchor="t">
             <a:spAutoFit/>
           </a:bodyPr>
           <a:lstStyle/>
@@ -8240,7 +8089,9 @@
         <p:txBody>
           <a:bodyPr rtlCol="0" anchor="ctr"/>
           <a:lstStyle/>
-          <a:p/>
+          <a:p>
+            <a:endParaRPr/>
+          </a:p>
         </p:txBody>
       </p:sp>
       <p:sp>
@@ -8260,7 +8111,7 @@
           <a:noFill/>
         </p:spPr>
         <p:txBody>
-          <a:bodyPr wrap="square" lIns="0" rIns="0" tIns="0" bIns="0" anchor="t">
+          <a:bodyPr wrap="square" lIns="0" tIns="0" rIns="0" bIns="0" anchor="t">
             <a:spAutoFit/>
           </a:bodyPr>
           <a:lstStyle/>
@@ -8342,7 +8193,9 @@
         <p:txBody>
           <a:bodyPr rtlCol="0" anchor="ctr"/>
           <a:lstStyle/>
-          <a:p/>
+          <a:p>
+            <a:endParaRPr/>
+          </a:p>
         </p:txBody>
       </p:sp>
       <p:sp>
@@ -8362,7 +8215,7 @@
           <a:noFill/>
         </p:spPr>
         <p:txBody>
-          <a:bodyPr wrap="square" lIns="0" rIns="0" tIns="0" bIns="0" anchor="t">
+          <a:bodyPr wrap="square" lIns="0" tIns="0" rIns="0" bIns="0" anchor="t">
             <a:spAutoFit/>
           </a:bodyPr>
           <a:lstStyle/>
@@ -8410,7 +8263,7 @@
 </file>
 
 <file path=ppt/slides/slide7.xml><?xml version="1.0" encoding="utf-8"?>
-<p:sld xmlns:a="http://schemas.openxmlformats.org/drawingml/2006/main" xmlns:p="http://schemas.openxmlformats.org/presentationml/2006/main" xmlns:r="http://schemas.openxmlformats.org/officeDocument/2006/relationships">
+<p:sld xmlns:a="http://schemas.openxmlformats.org/drawingml/2006/main" xmlns:r="http://schemas.openxmlformats.org/officeDocument/2006/relationships" xmlns:p="http://schemas.openxmlformats.org/presentationml/2006/main">
   <p:cSld>
     <p:bg>
       <p:bgPr>
@@ -8426,7 +8279,14 @@
         <p:cNvGrpSpPr/>
         <p:nvPr/>
       </p:nvGrpSpPr>
-      <p:grpSpPr/>
+      <p:grpSpPr>
+        <a:xfrm>
+          <a:off x="0" y="0"/>
+          <a:ext cx="0" cy="0"/>
+          <a:chOff x="0" y="0"/>
+          <a:chExt cx="0" cy="0"/>
+        </a:xfrm>
+      </p:grpSpPr>
       <p:sp>
         <p:nvSpPr>
           <p:cNvPr id="2" name="TextBox 1"/>
@@ -8444,7 +8304,7 @@
           <a:noFill/>
         </p:spPr>
         <p:txBody>
-          <a:bodyPr wrap="square" lIns="0" rIns="0" tIns="0" bIns="0" anchor="t">
+          <a:bodyPr wrap="square" lIns="0" tIns="0" rIns="0" bIns="0" anchor="t">
             <a:spAutoFit/>
           </a:bodyPr>
           <a:lstStyle/>
@@ -8507,7 +8367,9 @@
         <p:txBody>
           <a:bodyPr rtlCol="0" anchor="ctr"/>
           <a:lstStyle/>
-          <a:p/>
+          <a:p>
+            <a:endParaRPr/>
+          </a:p>
         </p:txBody>
       </p:sp>
       <p:sp>
@@ -8527,7 +8389,7 @@
           <a:noFill/>
         </p:spPr>
         <p:txBody>
-          <a:bodyPr wrap="square" lIns="0" rIns="0" tIns="0" bIns="0" anchor="t">
+          <a:bodyPr wrap="square" lIns="0" tIns="0" rIns="0" bIns="0" anchor="t">
             <a:spAutoFit/>
           </a:bodyPr>
           <a:lstStyle/>
@@ -8624,7 +8486,9 @@
         <p:txBody>
           <a:bodyPr rtlCol="0" anchor="ctr"/>
           <a:lstStyle/>
-          <a:p/>
+          <a:p>
+            <a:endParaRPr/>
+          </a:p>
         </p:txBody>
       </p:sp>
       <p:sp>
@@ -8644,7 +8508,7 @@
           <a:noFill/>
         </p:spPr>
         <p:txBody>
-          <a:bodyPr wrap="square" lIns="0" rIns="0" tIns="0" bIns="0" anchor="t">
+          <a:bodyPr wrap="square" lIns="0" tIns="0" rIns="0" bIns="0" anchor="t">
             <a:spAutoFit/>
           </a:bodyPr>
           <a:lstStyle/>
@@ -8757,7 +8621,9 @@
         <p:txBody>
           <a:bodyPr rtlCol="0" anchor="ctr"/>
           <a:lstStyle/>
-          <a:p/>
+          <a:p>
+            <a:endParaRPr/>
+          </a:p>
         </p:txBody>
       </p:sp>
       <p:sp>
@@ -8777,7 +8643,7 @@
           <a:noFill/>
         </p:spPr>
         <p:txBody>
-          <a:bodyPr wrap="square" lIns="0" rIns="0" tIns="0" bIns="0" anchor="t">
+          <a:bodyPr wrap="square" lIns="0" tIns="0" rIns="0" bIns="0" anchor="t">
             <a:spAutoFit/>
           </a:bodyPr>
           <a:lstStyle/>
@@ -8890,7 +8756,9 @@
         <p:txBody>
           <a:bodyPr rtlCol="0" anchor="ctr"/>
           <a:lstStyle/>
-          <a:p/>
+          <a:p>
+            <a:endParaRPr/>
+          </a:p>
         </p:txBody>
       </p:sp>
       <p:sp>
@@ -8910,7 +8778,7 @@
           <a:noFill/>
         </p:spPr>
         <p:txBody>
-          <a:bodyPr wrap="square" lIns="0" rIns="0" tIns="0" bIns="0" anchor="t">
+          <a:bodyPr wrap="square" lIns="0" tIns="0" rIns="0" bIns="0" anchor="t">
             <a:spAutoFit/>
           </a:bodyPr>
           <a:lstStyle/>
@@ -9007,7 +8875,9 @@
         <p:txBody>
           <a:bodyPr rtlCol="0" anchor="ctr"/>
           <a:lstStyle/>
-          <a:p/>
+          <a:p>
+            <a:endParaRPr/>
+          </a:p>
         </p:txBody>
       </p:sp>
       <p:sp>
@@ -9027,7 +8897,7 @@
           <a:noFill/>
         </p:spPr>
         <p:txBody>
-          <a:bodyPr wrap="square" lIns="0" rIns="0" tIns="0" bIns="0" anchor="t">
+          <a:bodyPr wrap="square" lIns="0" tIns="0" rIns="0" bIns="0" anchor="t">
             <a:spAutoFit/>
           </a:bodyPr>
           <a:lstStyle/>
@@ -9140,7 +9010,9 @@
         <p:txBody>
           <a:bodyPr rtlCol="0" anchor="ctr"/>
           <a:lstStyle/>
-          <a:p/>
+          <a:p>
+            <a:endParaRPr/>
+          </a:p>
         </p:txBody>
       </p:sp>
       <p:sp>
@@ -9160,7 +9032,7 @@
           <a:noFill/>
         </p:spPr>
         <p:txBody>
-          <a:bodyPr wrap="square" lIns="0" rIns="0" tIns="0" bIns="0" anchor="t">
+          <a:bodyPr wrap="square" lIns="0" tIns="0" rIns="0" bIns="0" anchor="t">
             <a:spAutoFit/>
           </a:bodyPr>
           <a:lstStyle/>
@@ -9257,7 +9129,9 @@
         <p:txBody>
           <a:bodyPr rtlCol="0" anchor="ctr"/>
           <a:lstStyle/>
-          <a:p/>
+          <a:p>
+            <a:endParaRPr/>
+          </a:p>
         </p:txBody>
       </p:sp>
       <p:sp>
@@ -9277,7 +9151,7 @@
           <a:noFill/>
         </p:spPr>
         <p:txBody>
-          <a:bodyPr wrap="square" lIns="0" rIns="0" tIns="0" bIns="0" anchor="t">
+          <a:bodyPr wrap="square" lIns="0" tIns="0" rIns="0" bIns="0" anchor="t">
             <a:spAutoFit/>
           </a:bodyPr>
           <a:lstStyle/>
@@ -9523,7 +9397,7 @@
           <a:noFill/>
         </p:spPr>
         <p:txBody>
-          <a:bodyPr wrap="square" lIns="0" rIns="0" tIns="0" bIns="0" anchor="t">
+          <a:bodyPr wrap="square" lIns="0" tIns="0" rIns="0" bIns="0" anchor="t">
             <a:spAutoFit/>
           </a:bodyPr>
           <a:lstStyle/>
@@ -9554,7 +9428,7 @@
 </file>
 
 <file path=ppt/slides/slide8.xml><?xml version="1.0" encoding="utf-8"?>
-<p:sld xmlns:a="http://schemas.openxmlformats.org/drawingml/2006/main" xmlns:p="http://schemas.openxmlformats.org/presentationml/2006/main" xmlns:r="http://schemas.openxmlformats.org/officeDocument/2006/relationships">
+<p:sld xmlns:a="http://schemas.openxmlformats.org/drawingml/2006/main" xmlns:r="http://schemas.openxmlformats.org/officeDocument/2006/relationships" xmlns:p="http://schemas.openxmlformats.org/presentationml/2006/main">
   <p:cSld>
     <p:bg>
       <p:bgPr>
@@ -9570,7 +9444,14 @@
         <p:cNvGrpSpPr/>
         <p:nvPr/>
       </p:nvGrpSpPr>
-      <p:grpSpPr/>
+      <p:grpSpPr>
+        <a:xfrm>
+          <a:off x="0" y="0"/>
+          <a:ext cx="0" cy="0"/>
+          <a:chOff x="0" y="0"/>
+          <a:chExt cx="0" cy="0"/>
+        </a:xfrm>
+      </p:grpSpPr>
       <p:sp>
         <p:nvSpPr>
           <p:cNvPr id="2" name="TextBox 1"/>
@@ -9588,7 +9469,7 @@
           <a:noFill/>
         </p:spPr>
         <p:txBody>
-          <a:bodyPr wrap="square" lIns="0" rIns="0" tIns="0" bIns="0" anchor="t">
+          <a:bodyPr wrap="square" lIns="0" tIns="0" rIns="0" bIns="0" anchor="t">
             <a:spAutoFit/>
           </a:bodyPr>
           <a:lstStyle/>
@@ -9647,7 +9528,7 @@
           </a:fontRef>
         </p:style>
         <p:txBody>
-          <a:bodyPr rtlCol="0" anchor="ctr" wrap="square" lIns="0" rIns="0" tIns="0" bIns="0"/>
+          <a:bodyPr wrap="square" lIns="0" tIns="0" rIns="0" bIns="0" rtlCol="0" anchor="ctr"/>
           <a:lstStyle/>
           <a:p>
             <a:pPr algn="ctr">
@@ -9684,7 +9565,7 @@
           <a:noFill/>
         </p:spPr>
         <p:txBody>
-          <a:bodyPr wrap="square" lIns="0" rIns="0" tIns="0" bIns="0" anchor="ctr">
+          <a:bodyPr wrap="square" lIns="0" tIns="0" rIns="0" bIns="0" anchor="ctr">
             <a:spAutoFit/>
           </a:bodyPr>
           <a:lstStyle/>
@@ -9778,7 +9659,7 @@
           </a:fontRef>
         </p:style>
         <p:txBody>
-          <a:bodyPr rtlCol="0" anchor="ctr" wrap="square" lIns="0" rIns="0" tIns="0" bIns="0"/>
+          <a:bodyPr wrap="square" lIns="0" tIns="0" rIns="0" bIns="0" rtlCol="0" anchor="ctr"/>
           <a:lstStyle/>
           <a:p>
             <a:pPr algn="ctr">
@@ -9815,7 +9696,7 @@
           <a:noFill/>
         </p:spPr>
         <p:txBody>
-          <a:bodyPr wrap="square" lIns="0" rIns="0" tIns="0" bIns="0" anchor="ctr">
+          <a:bodyPr wrap="square" lIns="0" tIns="0" rIns="0" bIns="0" anchor="ctr">
             <a:spAutoFit/>
           </a:bodyPr>
           <a:lstStyle/>
@@ -9909,7 +9790,7 @@
           </a:fontRef>
         </p:style>
         <p:txBody>
-          <a:bodyPr rtlCol="0" anchor="ctr" wrap="square" lIns="0" rIns="0" tIns="0" bIns="0"/>
+          <a:bodyPr wrap="square" lIns="0" tIns="0" rIns="0" bIns="0" rtlCol="0" anchor="ctr"/>
           <a:lstStyle/>
           <a:p>
             <a:pPr algn="ctr">
@@ -9946,7 +9827,7 @@
           <a:noFill/>
         </p:spPr>
         <p:txBody>
-          <a:bodyPr wrap="square" lIns="0" rIns="0" tIns="0" bIns="0" anchor="ctr">
+          <a:bodyPr wrap="square" lIns="0" tIns="0" rIns="0" bIns="0" anchor="ctr">
             <a:spAutoFit/>
           </a:bodyPr>
           <a:lstStyle/>
@@ -10040,7 +9921,7 @@
           </a:fontRef>
         </p:style>
         <p:txBody>
-          <a:bodyPr rtlCol="0" anchor="ctr" wrap="square" lIns="0" rIns="0" tIns="0" bIns="0"/>
+          <a:bodyPr wrap="square" lIns="0" tIns="0" rIns="0" bIns="0" rtlCol="0" anchor="ctr"/>
           <a:lstStyle/>
           <a:p>
             <a:pPr algn="ctr">
@@ -10077,7 +9958,7 @@
           <a:noFill/>
         </p:spPr>
         <p:txBody>
-          <a:bodyPr wrap="square" lIns="0" rIns="0" tIns="0" bIns="0" anchor="ctr">
+          <a:bodyPr wrap="square" lIns="0" tIns="0" rIns="0" bIns="0" anchor="ctr">
             <a:spAutoFit/>
           </a:bodyPr>
           <a:lstStyle/>
@@ -10140,7 +10021,9 @@
         <p:txBody>
           <a:bodyPr rtlCol="0" anchor="ctr"/>
           <a:lstStyle/>
-          <a:p/>
+          <a:p>
+            <a:endParaRPr/>
+          </a:p>
         </p:txBody>
       </p:sp>
       <p:sp>
@@ -10160,7 +10043,7 @@
           <a:noFill/>
         </p:spPr>
         <p:txBody>
-          <a:bodyPr wrap="square" lIns="0" rIns="0" tIns="0" bIns="0" anchor="t">
+          <a:bodyPr wrap="square" lIns="0" tIns="0" rIns="0" bIns="0" anchor="t">
             <a:spAutoFit/>
           </a:bodyPr>
           <a:lstStyle/>
@@ -10181,7 +10064,7 @@
             </a:r>
           </a:p>
           <a:p>
-            <a:pPr algn="l" marL="201168" indent="-201168">
+            <a:pPr marL="201168" indent="-201168" algn="l">
               <a:spcAft>
                 <a:spcPts val="1000"/>
               </a:spcAft>
@@ -10198,7 +10081,7 @@
             </a:r>
           </a:p>
           <a:p>
-            <a:pPr algn="l" marL="201168" indent="-201168">
+            <a:pPr marL="201168" indent="-201168" algn="l">
               <a:spcAft>
                 <a:spcPts val="1000"/>
               </a:spcAft>
@@ -10215,7 +10098,7 @@
             </a:r>
           </a:p>
           <a:p>
-            <a:pPr algn="l" marL="201168" indent="-201168">
+            <a:pPr marL="201168" indent="-201168" algn="l">
               <a:spcAft>
                 <a:spcPts val="1000"/>
               </a:spcAft>
@@ -10232,7 +10115,7 @@
             </a:r>
           </a:p>
           <a:p>
-            <a:pPr algn="l" marL="201168" indent="-201168">
+            <a:pPr marL="201168" indent="-201168" algn="l">
               <a:spcAft>
                 <a:spcPts val="1000"/>
               </a:spcAft>
@@ -10259,7 +10142,7 @@
 </file>
 
 <file path=ppt/slides/slide9.xml><?xml version="1.0" encoding="utf-8"?>
-<p:sld xmlns:a="http://schemas.openxmlformats.org/drawingml/2006/main" xmlns:p="http://schemas.openxmlformats.org/presentationml/2006/main" xmlns:r="http://schemas.openxmlformats.org/officeDocument/2006/relationships">
+<p:sld xmlns:a="http://schemas.openxmlformats.org/drawingml/2006/main" xmlns:r="http://schemas.openxmlformats.org/officeDocument/2006/relationships" xmlns:p="http://schemas.openxmlformats.org/presentationml/2006/main">
   <p:cSld>
     <p:bg>
       <p:bgPr>
@@ -10275,7 +10158,14 @@
         <p:cNvGrpSpPr/>
         <p:nvPr/>
       </p:nvGrpSpPr>
-      <p:grpSpPr/>
+      <p:grpSpPr>
+        <a:xfrm>
+          <a:off x="0" y="0"/>
+          <a:ext cx="0" cy="0"/>
+          <a:chOff x="0" y="0"/>
+          <a:chExt cx="0" cy="0"/>
+        </a:xfrm>
+      </p:grpSpPr>
       <p:sp>
         <p:nvSpPr>
           <p:cNvPr id="2" name="TextBox 1"/>
@@ -10293,7 +10183,7 @@
           <a:noFill/>
         </p:spPr>
         <p:txBody>
-          <a:bodyPr wrap="square" lIns="0" rIns="0" tIns="0" bIns="0" anchor="t">
+          <a:bodyPr wrap="square" lIns="0" tIns="0" rIns="0" bIns="0" anchor="t">
             <a:spAutoFit/>
           </a:bodyPr>
           <a:lstStyle/>
@@ -10332,7 +10222,7 @@
           <a:noFill/>
         </p:spPr>
         <p:txBody>
-          <a:bodyPr wrap="square" lIns="0" rIns="0" tIns="0" bIns="0" anchor="t">
+          <a:bodyPr wrap="square" lIns="0" tIns="0" rIns="0" bIns="0" anchor="t">
             <a:spAutoFit/>
           </a:bodyPr>
           <a:lstStyle/>
@@ -10395,7 +10285,9 @@
         <p:txBody>
           <a:bodyPr rtlCol="0" anchor="ctr"/>
           <a:lstStyle/>
-          <a:p/>
+          <a:p>
+            <a:endParaRPr/>
+          </a:p>
         </p:txBody>
       </p:sp>
       <p:sp>
@@ -10435,7 +10327,7 @@
           </a:fontRef>
         </p:style>
         <p:txBody>
-          <a:bodyPr rtlCol="0" anchor="ctr" wrap="square" lIns="0" rIns="0" tIns="0" bIns="0"/>
+          <a:bodyPr wrap="square" lIns="0" tIns="0" rIns="0" bIns="0" rtlCol="0" anchor="ctr"/>
           <a:lstStyle/>
           <a:p>
             <a:pPr algn="ctr">
@@ -10464,7 +10356,7 @@
         <p:spPr>
           <a:xfrm>
             <a:off x="822959" y="2971800"/>
-            <a:ext cx="2103120" cy="1737360"/>
+            <a:ext cx="2103120" cy="1102866"/>
           </a:xfrm>
           <a:prstGeom prst="rect">
             <a:avLst/>
@@ -10472,7 +10364,7 @@
           <a:noFill/>
         </p:spPr>
         <p:txBody>
-          <a:bodyPr wrap="square" lIns="0" rIns="0" tIns="0" bIns="0" anchor="t">
+          <a:bodyPr wrap="square" lIns="0" tIns="0" rIns="0" bIns="0" anchor="t">
             <a:spAutoFit/>
           </a:bodyPr>
           <a:lstStyle/>
@@ -10483,14 +10375,29 @@
               </a:spcAft>
             </a:pPr>
             <a:r>
-              <a:rPr sz="2000" b="1" i="0">
+              <a:rPr sz="2000" b="1" i="0" dirty="0">
                 <a:solidFill>
                   <a:srgbClr val="FFFFFF"/>
                 </a:solidFill>
                 <a:latin typeface="Arial"/>
               </a:rPr>
-              <a:t>Pago online</a:t>
-            </a:r>
+              <a:t>Pag</a:t>
+            </a:r>
+            <a:r>
+              <a:rPr lang="es-UY" sz="2000" b="1" i="0" dirty="0">
+                <a:solidFill>
+                  <a:srgbClr val="FFFFFF"/>
+                </a:solidFill>
+                <a:latin typeface="Arial"/>
+              </a:rPr>
+              <a:t>os</a:t>
+            </a:r>
+            <a:endParaRPr sz="2000" b="1" i="0" dirty="0">
+              <a:solidFill>
+                <a:srgbClr val="FFFFFF"/>
+              </a:solidFill>
+              <a:latin typeface="Arial"/>
+            </a:endParaRPr>
           </a:p>
           <a:p>
             <a:pPr algn="l">
@@ -10499,14 +10406,20 @@
               </a:spcAft>
             </a:pPr>
             <a:r>
-              <a:rPr sz="1500" b="0" i="0">
+              <a:rPr lang="es-UY" sz="1500" b="0" i="0" dirty="0">
                 <a:solidFill>
                   <a:srgbClr val="E7F3EC"/>
                 </a:solidFill>
                 <a:latin typeface="Calibri"/>
               </a:rPr>
-              <a:t>Mercado Pago y cuota mensual automática</a:t>
-            </a:r>
+              <a:t>Desde gestión del usuario a reflejarse en gestión del club.</a:t>
+            </a:r>
+            <a:endParaRPr sz="1500" b="0" i="0" dirty="0">
+              <a:solidFill>
+                <a:srgbClr val="E7F3EC"/>
+              </a:solidFill>
+              <a:latin typeface="Calibri"/>
+            </a:endParaRPr>
           </a:p>
         </p:txBody>
       </p:sp>
@@ -10551,7 +10464,9 @@
         <p:txBody>
           <a:bodyPr rtlCol="0" anchor="ctr"/>
           <a:lstStyle/>
-          <a:p/>
+          <a:p>
+            <a:endParaRPr/>
+          </a:p>
         </p:txBody>
       </p:sp>
       <p:sp>
@@ -10591,7 +10506,7 @@
           </a:fontRef>
         </p:style>
         <p:txBody>
-          <a:bodyPr rtlCol="0" anchor="ctr" wrap="square" lIns="0" rIns="0" tIns="0" bIns="0"/>
+          <a:bodyPr wrap="square" lIns="0" tIns="0" rIns="0" bIns="0" rtlCol="0" anchor="ctr"/>
           <a:lstStyle/>
           <a:p>
             <a:pPr algn="ctr">
@@ -10628,7 +10543,7 @@
           <a:noFill/>
         </p:spPr>
         <p:txBody>
-          <a:bodyPr wrap="square" lIns="0" rIns="0" tIns="0" bIns="0" anchor="t">
+          <a:bodyPr wrap="square" lIns="0" tIns="0" rIns="0" bIns="0" anchor="t">
             <a:spAutoFit/>
           </a:bodyPr>
           <a:lstStyle/>
@@ -10707,7 +10622,9 @@
         <p:txBody>
           <a:bodyPr rtlCol="0" anchor="ctr"/>
           <a:lstStyle/>
-          <a:p/>
+          <a:p>
+            <a:endParaRPr/>
+          </a:p>
         </p:txBody>
       </p:sp>
       <p:sp>
@@ -10747,7 +10664,7 @@
           </a:fontRef>
         </p:style>
         <p:txBody>
-          <a:bodyPr rtlCol="0" anchor="ctr" wrap="square" lIns="0" rIns="0" tIns="0" bIns="0"/>
+          <a:bodyPr wrap="square" lIns="0" tIns="0" rIns="0" bIns="0" rtlCol="0" anchor="ctr"/>
           <a:lstStyle/>
           <a:p>
             <a:pPr algn="ctr">
@@ -10784,7 +10701,7 @@
           <a:noFill/>
         </p:spPr>
         <p:txBody>
-          <a:bodyPr wrap="square" lIns="0" rIns="0" tIns="0" bIns="0" anchor="t">
+          <a:bodyPr wrap="square" lIns="0" tIns="0" rIns="0" bIns="0" anchor="t">
             <a:spAutoFit/>
           </a:bodyPr>
           <a:lstStyle/>
@@ -10863,7 +10780,9 @@
         <p:txBody>
           <a:bodyPr rtlCol="0" anchor="ctr"/>
           <a:lstStyle/>
-          <a:p/>
+          <a:p>
+            <a:endParaRPr/>
+          </a:p>
         </p:txBody>
       </p:sp>
       <p:sp>
@@ -10903,7 +10822,7 @@
           </a:fontRef>
         </p:style>
         <p:txBody>
-          <a:bodyPr rtlCol="0" anchor="ctr" wrap="square" lIns="0" rIns="0" tIns="0" bIns="0"/>
+          <a:bodyPr wrap="square" lIns="0" tIns="0" rIns="0" bIns="0" rtlCol="0" anchor="ctr"/>
           <a:lstStyle/>
           <a:p>
             <a:pPr algn="ctr">
@@ -10940,7 +10859,7 @@
           <a:noFill/>
         </p:spPr>
         <p:txBody>
-          <a:bodyPr wrap="square" lIns="0" rIns="0" tIns="0" bIns="0" anchor="t">
+          <a:bodyPr wrap="square" lIns="0" tIns="0" rIns="0" bIns="0" anchor="t">
             <a:spAutoFit/>
           </a:bodyPr>
           <a:lstStyle/>
@@ -10995,7 +10914,7 @@
           <a:noFill/>
         </p:spPr>
         <p:txBody>
-          <a:bodyPr wrap="square" lIns="0" rIns="0" tIns="0" bIns="0" anchor="t">
+          <a:bodyPr wrap="square" lIns="0" tIns="0" rIns="0" bIns="0" anchor="t">
             <a:spAutoFit/>
           </a:bodyPr>
           <a:lstStyle/>
@@ -11346,7 +11265,7 @@
 </file>
 
 <file path=ppt/theme/theme2.xml><?xml version="1.0" encoding="utf-8"?>
-<a:theme xmlns:a="http://schemas.openxmlformats.org/drawingml/2006/main" name="Office Theme">
+<a:theme xmlns:a="http://schemas.openxmlformats.org/drawingml/2006/main" name="Tema de Office">
   <a:themeElements>
     <a:clrScheme name="Office">
       <a:dk1>
@@ -11356,44 +11275,44 @@
         <a:sysClr val="window" lastClr="FFFFFF"/>
       </a:lt1>
       <a:dk2>
-        <a:srgbClr val="1F497D"/>
+        <a:srgbClr val="0E2841"/>
       </a:dk2>
       <a:lt2>
-        <a:srgbClr val="EEECE1"/>
+        <a:srgbClr val="E8E8E8"/>
       </a:lt2>
       <a:accent1>
-        <a:srgbClr val="4F81BD"/>
+        <a:srgbClr val="156082"/>
       </a:accent1>
       <a:accent2>
-        <a:srgbClr val="C0504D"/>
+        <a:srgbClr val="E97132"/>
       </a:accent2>
       <a:accent3>
-        <a:srgbClr val="9BBB59"/>
+        <a:srgbClr val="196B24"/>
       </a:accent3>
       <a:accent4>
-        <a:srgbClr val="8064A2"/>
+        <a:srgbClr val="0F9ED5"/>
       </a:accent4>
       <a:accent5>
-        <a:srgbClr val="4BACC6"/>
+        <a:srgbClr val="A02B93"/>
       </a:accent5>
       <a:accent6>
-        <a:srgbClr val="F79646"/>
+        <a:srgbClr val="4EA72E"/>
       </a:accent6>
       <a:hlink>
-        <a:srgbClr val="0000FF"/>
+        <a:srgbClr val="467886"/>
       </a:hlink>
       <a:folHlink>
-        <a:srgbClr val="800080"/>
+        <a:srgbClr val="96607D"/>
       </a:folHlink>
     </a:clrScheme>
     <a:fontScheme name="Office">
       <a:majorFont>
-        <a:latin typeface="Calibri"/>
+        <a:latin typeface="Aptos Display" panose="02110004020202020204"/>
         <a:ea typeface=""/>
         <a:cs typeface=""/>
-        <a:font script="Jpan" typeface="ＭＳ Ｐゴシック"/>
+        <a:font script="Jpan" typeface="游ゴシック Light"/>
         <a:font script="Hang" typeface="맑은 고딕"/>
-        <a:font script="Hans" typeface="宋体"/>
+        <a:font script="Hans" typeface="等线 Light"/>
         <a:font script="Hant" typeface="新細明體"/>
         <a:font script="Arab" typeface="Times New Roman"/>
         <a:font script="Hebr" typeface="Times New Roman"/>
@@ -11421,14 +11340,31 @@
         <a:font script="Viet" typeface="Times New Roman"/>
         <a:font script="Uigh" typeface="Microsoft Uighur"/>
         <a:font script="Geor" typeface="Sylfaen"/>
+        <a:font script="Armn" typeface="Arial"/>
+        <a:font script="Bugi" typeface="Leelawadee UI"/>
+        <a:font script="Bopo" typeface="Microsoft JhengHei"/>
+        <a:font script="Java" typeface="Javanese Text"/>
+        <a:font script="Lisu" typeface="Segoe UI"/>
+        <a:font script="Mymr" typeface="Myanmar Text"/>
+        <a:font script="Nkoo" typeface="Ebrima"/>
+        <a:font script="Olck" typeface="Nirmala UI"/>
+        <a:font script="Osma" typeface="Ebrima"/>
+        <a:font script="Phag" typeface="Phagspa"/>
+        <a:font script="Syrn" typeface="Estrangelo Edessa"/>
+        <a:font script="Syrj" typeface="Estrangelo Edessa"/>
+        <a:font script="Syre" typeface="Estrangelo Edessa"/>
+        <a:font script="Sora" typeface="Nirmala UI"/>
+        <a:font script="Tale" typeface="Microsoft Tai Le"/>
+        <a:font script="Talu" typeface="Microsoft New Tai Lue"/>
+        <a:font script="Tfng" typeface="Ebrima"/>
       </a:majorFont>
       <a:minorFont>
-        <a:latin typeface="Calibri"/>
+        <a:latin typeface="Aptos" panose="02110004020202020204"/>
         <a:ea typeface=""/>
         <a:cs typeface=""/>
-        <a:font script="Jpan" typeface="ＭＳ Ｐゴシック"/>
+        <a:font script="Jpan" typeface="游ゴシック"/>
         <a:font script="Hang" typeface="맑은 고딕"/>
-        <a:font script="Hans" typeface="宋体"/>
+        <a:font script="Hans" typeface="等线"/>
         <a:font script="Hant" typeface="新細明體"/>
         <a:font script="Arab" typeface="Arial"/>
         <a:font script="Hebr" typeface="Arial"/>
@@ -11456,6 +11392,23 @@
         <a:font script="Viet" typeface="Arial"/>
         <a:font script="Uigh" typeface="Microsoft Uighur"/>
         <a:font script="Geor" typeface="Sylfaen"/>
+        <a:font script="Armn" typeface="Arial"/>
+        <a:font script="Bugi" typeface="Leelawadee UI"/>
+        <a:font script="Bopo" typeface="Microsoft JhengHei"/>
+        <a:font script="Java" typeface="Javanese Text"/>
+        <a:font script="Lisu" typeface="Segoe UI"/>
+        <a:font script="Mymr" typeface="Myanmar Text"/>
+        <a:font script="Nkoo" typeface="Ebrima"/>
+        <a:font script="Olck" typeface="Nirmala UI"/>
+        <a:font script="Osma" typeface="Ebrima"/>
+        <a:font script="Phag" typeface="Phagspa"/>
+        <a:font script="Syrn" typeface="Estrangelo Edessa"/>
+        <a:font script="Syrj" typeface="Estrangelo Edessa"/>
+        <a:font script="Syre" typeface="Estrangelo Edessa"/>
+        <a:font script="Sora" typeface="Nirmala UI"/>
+        <a:font script="Tale" typeface="Microsoft Tai Le"/>
+        <a:font script="Talu" typeface="Microsoft New Tai Lue"/>
+        <a:font script="Tfng" typeface="Ebrima"/>
       </a:minorFont>
     </a:fontScheme>
     <a:fmtScheme name="Office">
@@ -11467,180 +11420,136 @@
           <a:gsLst>
             <a:gs pos="0">
               <a:schemeClr val="phClr">
-                <a:tint val="50000"/>
-                <a:satMod val="300000"/>
+                <a:lumMod val="110000"/>
+                <a:satMod val="105000"/>
+                <a:tint val="67000"/>
               </a:schemeClr>
             </a:gs>
-            <a:gs pos="35000">
+            <a:gs pos="50000">
               <a:schemeClr val="phClr">
-                <a:tint val="37000"/>
-                <a:satMod val="300000"/>
+                <a:lumMod val="105000"/>
+                <a:satMod val="103000"/>
+                <a:tint val="73000"/>
               </a:schemeClr>
             </a:gs>
             <a:gs pos="100000">
               <a:schemeClr val="phClr">
-                <a:tint val="15000"/>
-                <a:satMod val="350000"/>
+                <a:lumMod val="105000"/>
+                <a:satMod val="109000"/>
+                <a:tint val="81000"/>
               </a:schemeClr>
             </a:gs>
           </a:gsLst>
-          <a:lin ang="16200000" scaled="1"/>
+          <a:lin ang="5400000" scaled="0"/>
         </a:gradFill>
         <a:gradFill rotWithShape="1">
           <a:gsLst>
             <a:gs pos="0">
               <a:schemeClr val="phClr">
-                <a:tint val="100000"/>
+                <a:satMod val="103000"/>
+                <a:lumMod val="102000"/>
+                <a:tint val="94000"/>
+              </a:schemeClr>
+            </a:gs>
+            <a:gs pos="50000">
+              <a:schemeClr val="phClr">
+                <a:satMod val="110000"/>
+                <a:lumMod val="100000"/>
                 <a:shade val="100000"/>
-                <a:satMod val="130000"/>
               </a:schemeClr>
             </a:gs>
             <a:gs pos="100000">
               <a:schemeClr val="phClr">
-                <a:tint val="50000"/>
-                <a:shade val="100000"/>
-                <a:satMod val="350000"/>
+                <a:lumMod val="99000"/>
+                <a:satMod val="120000"/>
+                <a:shade val="78000"/>
               </a:schemeClr>
             </a:gs>
           </a:gsLst>
-          <a:lin ang="16200000" scaled="0"/>
+          <a:lin ang="5400000" scaled="0"/>
         </a:gradFill>
       </a:fillStyleLst>
       <a:lnStyleLst>
-        <a:ln w="9525" cap="flat" cmpd="sng" algn="ctr">
+        <a:ln w="12700" cap="flat" cmpd="sng" algn="ctr">
           <a:solidFill>
-            <a:schemeClr val="phClr">
-              <a:shade val="95000"/>
-              <a:satMod val="105000"/>
-            </a:schemeClr>
+            <a:schemeClr val="phClr"/>
           </a:solidFill>
           <a:prstDash val="solid"/>
+          <a:miter lim="800000"/>
+        </a:ln>
+        <a:ln w="19050" cap="flat" cmpd="sng" algn="ctr">
+          <a:solidFill>
+            <a:schemeClr val="phClr"/>
+          </a:solidFill>
+          <a:prstDash val="solid"/>
+          <a:miter lim="800000"/>
         </a:ln>
         <a:ln w="25400" cap="flat" cmpd="sng" algn="ctr">
           <a:solidFill>
             <a:schemeClr val="phClr"/>
           </a:solidFill>
           <a:prstDash val="solid"/>
-        </a:ln>
-        <a:ln w="38100" cap="flat" cmpd="sng" algn="ctr">
-          <a:solidFill>
-            <a:schemeClr val="phClr"/>
-          </a:solidFill>
-          <a:prstDash val="solid"/>
+          <a:miter lim="800000"/>
         </a:ln>
       </a:lnStyleLst>
       <a:effectStyleLst>
         <a:effectStyle>
+          <a:effectLst/>
+        </a:effectStyle>
+        <a:effectStyle>
+          <a:effectLst/>
+        </a:effectStyle>
+        <a:effectStyle>
           <a:effectLst>
-            <a:outerShdw blurRad="40000" dist="20000" dir="5400000" rotWithShape="0">
+            <a:outerShdw blurRad="57150" dist="19050" dir="5400000" algn="ctr" rotWithShape="0">
               <a:srgbClr val="000000">
-                <a:alpha val="38000"/>
+                <a:alpha val="63000"/>
               </a:srgbClr>
             </a:outerShdw>
           </a:effectLst>
-        </a:effectStyle>
-        <a:effectStyle>
-          <a:effectLst>
-            <a:outerShdw blurRad="40000" dist="23000" dir="5400000" rotWithShape="0">
-              <a:srgbClr val="000000">
-                <a:alpha val="35000"/>
-              </a:srgbClr>
-            </a:outerShdw>
-          </a:effectLst>
-        </a:effectStyle>
-        <a:effectStyle>
-          <a:effectLst>
-            <a:outerShdw blurRad="40000" dist="23000" dir="5400000" rotWithShape="0">
-              <a:srgbClr val="000000">
-                <a:alpha val="35000"/>
-              </a:srgbClr>
-            </a:outerShdw>
-          </a:effectLst>
-          <a:scene3d>
-            <a:camera prst="orthographicFront">
-              <a:rot lat="0" lon="0" rev="0"/>
-            </a:camera>
-            <a:lightRig rig="threePt" dir="t">
-              <a:rot lat="0" lon="0" rev="1200000"/>
-            </a:lightRig>
-          </a:scene3d>
-          <a:sp3d>
-            <a:bevelT w="63500" h="25400"/>
-          </a:sp3d>
         </a:effectStyle>
       </a:effectStyleLst>
       <a:bgFillStyleLst>
         <a:solidFill>
           <a:schemeClr val="phClr"/>
         </a:solidFill>
+        <a:solidFill>
+          <a:schemeClr val="phClr">
+            <a:tint val="95000"/>
+            <a:satMod val="170000"/>
+          </a:schemeClr>
+        </a:solidFill>
         <a:gradFill rotWithShape="1">
           <a:gsLst>
             <a:gs pos="0">
               <a:schemeClr val="phClr">
-                <a:tint val="40000"/>
-                <a:satMod val="350000"/>
+                <a:tint val="93000"/>
+                <a:satMod val="150000"/>
+                <a:shade val="98000"/>
+                <a:lumMod val="102000"/>
               </a:schemeClr>
             </a:gs>
-            <a:gs pos="40000">
+            <a:gs pos="50000">
               <a:schemeClr val="phClr">
-                <a:tint val="45000"/>
-                <a:shade val="99000"/>
-                <a:satMod val="350000"/>
+                <a:tint val="98000"/>
+                <a:satMod val="130000"/>
+                <a:shade val="90000"/>
+                <a:lumMod val="103000"/>
               </a:schemeClr>
             </a:gs>
             <a:gs pos="100000">
               <a:schemeClr val="phClr">
-                <a:shade val="20000"/>
-                <a:satMod val="255000"/>
+                <a:shade val="63000"/>
+                <a:satMod val="120000"/>
               </a:schemeClr>
             </a:gs>
           </a:gsLst>
-          <a:path path="circle">
-            <a:fillToRect l="50000" t="-80000" r="50000" b="180000"/>
-          </a:path>
-        </a:gradFill>
-        <a:gradFill rotWithShape="1">
-          <a:gsLst>
-            <a:gs pos="0">
-              <a:schemeClr val="phClr">
-                <a:tint val="80000"/>
-                <a:satMod val="300000"/>
-              </a:schemeClr>
-            </a:gs>
-            <a:gs pos="100000">
-              <a:schemeClr val="phClr">
-                <a:shade val="30000"/>
-                <a:satMod val="200000"/>
-              </a:schemeClr>
-            </a:gs>
-          </a:gsLst>
-          <a:path path="circle">
-            <a:fillToRect l="50000" t="50000" r="50000" b="50000"/>
-          </a:path>
+          <a:lin ang="5400000" scaled="0"/>
         </a:gradFill>
       </a:bgFillStyleLst>
     </a:fmtScheme>
   </a:themeElements>
   <a:objectDefaults>
-    <a:spDef>
-      <a:spPr/>
-      <a:bodyPr/>
-      <a:lstStyle/>
-      <a:style>
-        <a:lnRef idx="1">
-          <a:schemeClr val="accent1"/>
-        </a:lnRef>
-        <a:fillRef idx="3">
-          <a:schemeClr val="accent1"/>
-        </a:fillRef>
-        <a:effectRef idx="2">
-          <a:schemeClr val="accent1"/>
-        </a:effectRef>
-        <a:fontRef idx="minor">
-          <a:schemeClr val="lt1"/>
-        </a:fontRef>
-      </a:style>
-    </a:spDef>
     <a:lnDef>
       <a:spPr/>
       <a:bodyPr/>
@@ -11662,5 +11571,10 @@
     </a:lnDef>
   </a:objectDefaults>
   <a:extraClrSchemeLst/>
+  <a:extLst>
+    <a:ext uri="{05A4C25C-085E-4340-85A3-A5531E510DB2}">
+      <thm15:themeFamily xmlns:thm15="http://schemas.microsoft.com/office/thememl/2012/main" name="Office Theme" id="{2E142A2C-CD16-42D6-873A-C26D2A0506FA}" vid="{1BDDFF52-6CD6-40A5-AB3C-68EB2F1E4D0A}"/>
+    </a:ext>
+  </a:extLst>
 </a:theme>
 </file>